--- a/06_render/out/deck_retinoids_v2.pptx
+++ b/06_render/out/deck_retinoids_v2.pptx
@@ -7567,7 +7567,7 @@
                 </a:solidFill>
                 <a:latin typeface="Arimo"/>
               </a:rPr>
-              <a:t>Безопасность и Ограничения</a:t>
+              <a:t>Противопоказания и Ограничения</a:t>
             </a:r>
           </a:p>
         </p:txBody>

--- a/06_render/out/deck_retinoids_v2.pptx
+++ b/06_render/out/deck_retinoids_v2.pptx
@@ -3223,7 +3223,7 @@
               </a:lnSpc>
               <a:defRPr sz="3600" b="1" i="0">
                 <a:solidFill>
-                  <a:srgbClr val="2C3440"/>
+                  <a:srgbClr val="1D291C"/>
                 </a:solidFill>
                 <a:latin typeface="Arimo"/>
               </a:defRPr>
@@ -3231,7 +3231,7 @@
             <a:r>
               <a:rPr sz="3600" b="1" i="0">
                 <a:solidFill>
-                  <a:srgbClr val="2C3440"/>
+                  <a:srgbClr val="1D291C"/>
                 </a:solidFill>
                 <a:latin typeface="Arimo"/>
               </a:rPr>
@@ -3341,7 +3341,7 @@
                 </a:solidFill>
                 <a:latin typeface="Arimo"/>
               </a:rPr>
-              <a:t>Ретиноиды в дерматологии</a:t>
+              <a:t>[Placeholder] Ретиноиды в дерматологии</a:t>
             </a:r>
           </a:p>
         </p:txBody>
@@ -3490,7 +3490,7 @@
               </a:lnSpc>
               <a:defRPr sz="2600" b="1" i="0">
                 <a:solidFill>
-                  <a:srgbClr val="2C3440"/>
+                  <a:srgbClr val="1D291C"/>
                 </a:solidFill>
                 <a:latin typeface="Arimo"/>
               </a:defRPr>
@@ -3498,7 +3498,7 @@
             <a:r>
               <a:rPr sz="2600" b="1" i="0">
                 <a:solidFill>
-                  <a:srgbClr val="2C3440"/>
+                  <a:srgbClr val="1D291C"/>
                 </a:solidFill>
                 <a:latin typeface="Arimo"/>
               </a:rPr>
@@ -3856,7 +3856,7 @@
               </a:lnSpc>
               <a:defRPr sz="3600" b="1" i="0">
                 <a:solidFill>
-                  <a:srgbClr val="2C3440"/>
+                  <a:srgbClr val="1D291C"/>
                 </a:solidFill>
                 <a:latin typeface="Arimo"/>
               </a:defRPr>
@@ -3864,7 +3864,7 @@
             <a:r>
               <a:rPr sz="3600" b="1" i="0">
                 <a:solidFill>
-                  <a:srgbClr val="2C3440"/>
+                  <a:srgbClr val="1D291C"/>
                 </a:solidFill>
                 <a:latin typeface="Arimo"/>
               </a:rPr>
@@ -3984,7 +3984,7 @@
                 </a:solidFill>
                 <a:latin typeface="Arimo"/>
               </a:rPr>
-              <a:t>ТОЛЬКО ДЛЯ ПРАКТИКУЮЩИХ СПЕЦИАЛИСТОВ</a:t>
+              <a:t>ТОЛЬКО ДЛЯ ПРАКТИКУЮЩИХ СПЕЦИАЛИСТОВ | SERVIER MEDICAL ART BY LES LABORATOIRES SERVIER (CC-BY 4.0)</a:t>
             </a:r>
           </a:p>
         </p:txBody>
@@ -4062,7 +4062,7 @@
               </a:lnSpc>
               <a:defRPr sz="2600" b="1" i="0">
                 <a:solidFill>
-                  <a:srgbClr val="2C3440"/>
+                  <a:srgbClr val="1D291C"/>
                 </a:solidFill>
                 <a:latin typeface="Arimo"/>
               </a:defRPr>
@@ -4070,7 +4070,7 @@
             <a:r>
               <a:rPr sz="2600" b="1" i="0">
                 <a:solidFill>
-                  <a:srgbClr val="2C3440"/>
+                  <a:srgbClr val="1D291C"/>
                 </a:solidFill>
                 <a:latin typeface="Arimo"/>
               </a:rPr>
@@ -4132,8 +4132,8 @@
         </p:nvSpPr>
         <p:spPr>
           <a:xfrm>
-            <a:off x="4114800" y="1339453"/>
-            <a:ext cx="914400" cy="548640"/>
+            <a:off x="357187" y="1339453"/>
+            <a:ext cx="4572000" cy="2926080"/>
           </a:xfrm>
           <a:prstGeom prst="rect">
             <a:avLst/>
@@ -4146,74 +4146,53 @@
           </a:bodyPr>
           <a:lstStyle/>
           <a:p>
-            <a:pPr algn="ctr">
+            <a:pPr algn="l">
               <a:lnSpc>
                 <a:spcPct val="120000"/>
               </a:lnSpc>
-              <a:defRPr sz="7200" b="1" i="0">
-                <a:solidFill>
-                  <a:srgbClr val="D7E0CE"/>
-                </a:solidFill>
-                <a:latin typeface="Arimo"/>
-              </a:defRPr>
-            </a:pPr>
-            <a:r>
-              <a:rPr sz="7200" b="1" i="0">
-                <a:solidFill>
-                  <a:srgbClr val="D7E0CE"/>
-                </a:solidFill>
-                <a:latin typeface="Arimo"/>
-              </a:rPr>
-              <a:t>“</a:t>
-            </a:r>
-          </a:p>
-        </p:txBody>
-      </p:sp>
-      <p:sp>
-        <p:nvSpPr>
-          <p:cNvPr id="7" name="TextBox 6"/>
-          <p:cNvSpPr txBox="1"/>
-          <p:nvPr/>
-        </p:nvSpPr>
-        <p:spPr>
-          <a:xfrm>
-            <a:off x="914400" y="2053828"/>
-            <a:ext cx="7315200" cy="1828800"/>
+              <a:defRPr sz="1500" b="0" i="0">
+                <a:solidFill>
+                  <a:srgbClr val="3D4A40"/>
+                </a:solidFill>
+                <a:latin typeface="Arimo"/>
+              </a:defRPr>
+            </a:pPr>
+            <a:r>
+              <a:rPr sz="1500" b="0" i="0">
+                <a:solidFill>
+                  <a:srgbClr val="3D4A40"/>
+                </a:solidFill>
+                <a:latin typeface="Arimo"/>
+              </a:rPr>
+              <a:t>• Ретиноиды регулируют генную транскрипцию путем связывания с ядерными рецепторами RAR и RXR.</a:t>
+            </a:r>
+          </a:p>
+        </p:txBody>
+      </p:sp>
+      <p:pic>
+        <p:nvPicPr>
+          <p:cNvPr id="7" name="Picture 6" descr="rar_rxr_mechanism.png"/>
+          <p:cNvPicPr>
+            <a:picLocks noChangeAspect="1"/>
+          </p:cNvPicPr>
+          <p:nvPr/>
+        </p:nvPicPr>
+        <p:blipFill>
+          <a:blip r:embed="rId2"/>
+          <a:stretch>
+            <a:fillRect/>
+          </a:stretch>
+        </p:blipFill>
+        <p:spPr>
+          <a:xfrm>
+            <a:off x="5179218" y="1339453"/>
+            <a:ext cx="3607593" cy="2857500"/>
           </a:xfrm>
           <a:prstGeom prst="rect">
             <a:avLst/>
           </a:prstGeom>
-          <a:noFill/>
-        </p:spPr>
-        <p:txBody>
-          <a:bodyPr wrap="square" tIns="0" bIns="0" lIns="0" rIns="0">
-            <a:spAutoFit/>
-          </a:bodyPr>
-          <a:lstStyle/>
-          <a:p>
-            <a:pPr algn="ctr">
-              <a:lnSpc>
-                <a:spcPct val="120000"/>
-              </a:lnSpc>
-              <a:defRPr sz="2000" b="0" i="1">
-                <a:solidFill>
-                  <a:srgbClr val="2C3440"/>
-                </a:solidFill>
-                <a:latin typeface="Arimo"/>
-              </a:defRPr>
-            </a:pPr>
-            <a:r>
-              <a:rPr sz="2000" b="0" i="1">
-                <a:solidFill>
-                  <a:srgbClr val="2C3440"/>
-                </a:solidFill>
-                <a:latin typeface="Arimo"/>
-              </a:rPr>
-              <a:t>Ретиноиды регулируют генную транскрипцию путем связывания с ядерными рецепторами RAR и RXR.</a:t>
-            </a:r>
-          </a:p>
-        </p:txBody>
-      </p:sp>
+        </p:spPr>
+      </p:pic>
     </p:spTree>
   </p:cSld>
   <p:clrMapOvr>
@@ -4358,7 +4337,7 @@
               </a:lnSpc>
               <a:defRPr sz="2600" b="1" i="0">
                 <a:solidFill>
-                  <a:srgbClr val="2C3440"/>
+                  <a:srgbClr val="1D291C"/>
                 </a:solidFill>
                 <a:latin typeface="Arimo"/>
               </a:defRPr>
@@ -4366,7 +4345,7 @@
             <a:r>
               <a:rPr sz="2600" b="1" i="0">
                 <a:solidFill>
-                  <a:srgbClr val="2C3440"/>
+                  <a:srgbClr val="1D291C"/>
                 </a:solidFill>
                 <a:latin typeface="Arimo"/>
               </a:rPr>
@@ -4552,7 +4531,7 @@
               </a:lnSpc>
               <a:defRPr sz="1400" b="1" i="0">
                 <a:solidFill>
-                  <a:srgbClr val="2C3440"/>
+                  <a:srgbClr val="1D291C"/>
                 </a:solidFill>
                 <a:latin typeface="Arimo"/>
               </a:defRPr>
@@ -4560,7 +4539,7 @@
             <a:r>
               <a:rPr sz="1400" b="1" i="0">
                 <a:solidFill>
-                  <a:srgbClr val="2C3440"/>
+                  <a:srgbClr val="1D291C"/>
                 </a:solidFill>
                 <a:latin typeface="Arimo"/>
               </a:rPr>
@@ -4746,7 +4725,7 @@
               </a:lnSpc>
               <a:defRPr sz="1400" b="1" i="0">
                 <a:solidFill>
-                  <a:srgbClr val="2C3440"/>
+                  <a:srgbClr val="1D291C"/>
                 </a:solidFill>
                 <a:latin typeface="Arimo"/>
               </a:defRPr>
@@ -4754,7 +4733,7 @@
             <a:r>
               <a:rPr sz="1400" b="1" i="0">
                 <a:solidFill>
-                  <a:srgbClr val="2C3440"/>
+                  <a:srgbClr val="1D291C"/>
                 </a:solidFill>
                 <a:latin typeface="Arimo"/>
               </a:rPr>
@@ -4940,7 +4919,7 @@
               </a:lnSpc>
               <a:defRPr sz="1400" b="1" i="0">
                 <a:solidFill>
-                  <a:srgbClr val="2C3440"/>
+                  <a:srgbClr val="1D291C"/>
                 </a:solidFill>
                 <a:latin typeface="Arimo"/>
               </a:defRPr>
@@ -4948,7 +4927,7 @@
             <a:r>
               <a:rPr sz="1400" b="1" i="0">
                 <a:solidFill>
-                  <a:srgbClr val="2C3440"/>
+                  <a:srgbClr val="1D291C"/>
                 </a:solidFill>
                 <a:latin typeface="Arimo"/>
               </a:rPr>
@@ -5134,7 +5113,7 @@
               </a:lnSpc>
               <a:defRPr sz="1400" b="1" i="0">
                 <a:solidFill>
-                  <a:srgbClr val="2C3440"/>
+                  <a:srgbClr val="1D291C"/>
                 </a:solidFill>
                 <a:latin typeface="Arimo"/>
               </a:defRPr>
@@ -5142,7 +5121,7 @@
             <a:r>
               <a:rPr sz="1400" b="1" i="0">
                 <a:solidFill>
-                  <a:srgbClr val="2C3440"/>
+                  <a:srgbClr val="1D291C"/>
                 </a:solidFill>
                 <a:latin typeface="Arimo"/>
               </a:rPr>
@@ -5262,7 +5241,7 @@
                 </a:solidFill>
                 <a:latin typeface="Arimo"/>
               </a:rPr>
-              <a:t>ТОЛЬКО ДЛЯ ПРАКТИКУЮЩИХ СПЕЦИАЛИСТОВ</a:t>
+              <a:t>ТОЛЬКО ДЛЯ ПРАКТИКУЮЩИХ СПЕЦИАЛИСТОВ | SERVIER MEDICAL ART BY LES LABORATOIRES SERVIER (CC-BY 4.0)</a:t>
             </a:r>
           </a:p>
         </p:txBody>
@@ -5340,7 +5319,7 @@
               </a:lnSpc>
               <a:defRPr sz="2600" b="1" i="0">
                 <a:solidFill>
-                  <a:srgbClr val="2C3440"/>
+                  <a:srgbClr val="1D291C"/>
                 </a:solidFill>
                 <a:latin typeface="Arimo"/>
               </a:defRPr>
@@ -5348,7 +5327,7 @@
             <a:r>
               <a:rPr sz="2600" b="1" i="0">
                 <a:solidFill>
-                  <a:srgbClr val="2C3440"/>
+                  <a:srgbClr val="1D291C"/>
                 </a:solidFill>
                 <a:latin typeface="Arimo"/>
               </a:rPr>
@@ -5517,67 +5496,30 @@
           </a:p>
         </p:txBody>
       </p:sp>
-      <p:sp>
-        <p:nvSpPr>
-          <p:cNvPr id="7" name="Rounded Rectangle 6"/>
-          <p:cNvSpPr/>
-          <p:nvPr/>
-        </p:nvSpPr>
+      <p:pic>
+        <p:nvPicPr>
+          <p:cNvPr id="7" name="Picture 6" descr="skin_layers_turnover.png"/>
+          <p:cNvPicPr>
+            <a:picLocks noChangeAspect="1"/>
+          </p:cNvPicPr>
+          <p:nvPr/>
+        </p:nvPicPr>
+        <p:blipFill>
+          <a:blip r:embed="rId2"/>
+          <a:stretch>
+            <a:fillRect/>
+          </a:stretch>
+        </p:blipFill>
         <p:spPr>
           <a:xfrm>
             <a:off x="5179218" y="1339453"/>
             <a:ext cx="3607593" cy="2857500"/>
           </a:xfrm>
-          <a:prstGeom prst="roundRect">
-            <a:avLst/>
-          </a:prstGeom>
-          <a:solidFill>
-            <a:srgbClr val="D7E0CE"/>
-          </a:solidFill>
-          <a:ln w="12700">
-            <a:solidFill>
-              <a:srgbClr val="D7E0CE"/>
-            </a:solidFill>
-          </a:ln>
-        </p:spPr>
-        <p:style>
-          <a:lnRef idx="1">
-            <a:schemeClr val="accent1"/>
-          </a:lnRef>
-          <a:fillRef idx="3">
-            <a:schemeClr val="accent1"/>
-          </a:fillRef>
-          <a:effectRef idx="2">
-            <a:schemeClr val="accent1"/>
-          </a:effectRef>
-          <a:fontRef idx="minor">
-            <a:schemeClr val="lt1"/>
-          </a:fontRef>
-        </p:style>
-        <p:txBody>
-          <a:bodyPr rtlCol="0" anchor="ctr" wrap="square"/>
-          <a:lstStyle/>
-          <a:p>
-            <a:pPr algn="ctr">
-              <a:defRPr sz="1300" b="1">
-                <a:solidFill>
-                  <a:srgbClr val="6D8470"/>
-                </a:solidFill>
-                <a:latin typeface="Arimo"/>
-              </a:defRPr>
-            </a:pPr>
-            <a:r>
-              <a:rPr sz="1300" b="1">
-                <a:solidFill>
-                  <a:srgbClr val="6D8470"/>
-                </a:solidFill>
-                <a:latin typeface="Arimo"/>
-              </a:rPr>
-              <a:t>Эффект третиноина на эпидермис</a:t>
-            </a:r>
-          </a:p>
-        </p:txBody>
-      </p:sp>
+          <a:prstGeom prst="rect">
+            <a:avLst/>
+          </a:prstGeom>
+        </p:spPr>
+      </p:pic>
     </p:spTree>
   </p:cSld>
   <p:clrMapOvr>
@@ -5722,7 +5664,7 @@
               </a:lnSpc>
               <a:defRPr sz="2600" b="1" i="0">
                 <a:solidFill>
-                  <a:srgbClr val="2C3440"/>
+                  <a:srgbClr val="1D291C"/>
                 </a:solidFill>
                 <a:latin typeface="Arimo"/>
               </a:defRPr>
@@ -5730,7 +5672,7 @@
             <a:r>
               <a:rPr sz="2600" b="1" i="0">
                 <a:solidFill>
-                  <a:srgbClr val="2C3440"/>
+                  <a:srgbClr val="1D291C"/>
                 </a:solidFill>
                 <a:latin typeface="Arimo"/>
               </a:rPr>
@@ -6198,7 +6140,7 @@
               </a:lnSpc>
               <a:defRPr sz="2600" b="1" i="0">
                 <a:solidFill>
-                  <a:srgbClr val="2C3440"/>
+                  <a:srgbClr val="1D291C"/>
                 </a:solidFill>
                 <a:latin typeface="Arimo"/>
               </a:defRPr>
@@ -6206,7 +6148,7 @@
             <a:r>
               <a:rPr sz="2600" b="1" i="0">
                 <a:solidFill>
-                  <a:srgbClr val="2C3440"/>
+                  <a:srgbClr val="1D291C"/>
                 </a:solidFill>
                 <a:latin typeface="Arimo"/>
               </a:rPr>
@@ -6333,7 +6275,7 @@
               </a:lnSpc>
               <a:defRPr sz="1800" b="1" i="0">
                 <a:solidFill>
-                  <a:srgbClr val="2C3440"/>
+                  <a:srgbClr val="1D291C"/>
                 </a:solidFill>
                 <a:latin typeface="Arimo"/>
               </a:defRPr>
@@ -6341,7 +6283,7 @@
             <a:r>
               <a:rPr sz="1800" b="1" i="0">
                 <a:solidFill>
-                  <a:srgbClr val="2C3440"/>
+                  <a:srgbClr val="1D291C"/>
                 </a:solidFill>
                 <a:latin typeface="Arimo"/>
               </a:rPr>
@@ -6468,7 +6410,7 @@
               </a:lnSpc>
               <a:defRPr sz="1800" b="1" i="0">
                 <a:solidFill>
-                  <a:srgbClr val="2C3440"/>
+                  <a:srgbClr val="1D291C"/>
                 </a:solidFill>
                 <a:latin typeface="Arimo"/>
               </a:defRPr>
@@ -6476,7 +6418,7 @@
             <a:r>
               <a:rPr sz="1800" b="1" i="0">
                 <a:solidFill>
-                  <a:srgbClr val="2C3440"/>
+                  <a:srgbClr val="1D291C"/>
                 </a:solidFill>
                 <a:latin typeface="Arimo"/>
               </a:rPr>
@@ -6603,7 +6545,7 @@
               </a:lnSpc>
               <a:defRPr sz="1800" b="1" i="0">
                 <a:solidFill>
-                  <a:srgbClr val="2C3440"/>
+                  <a:srgbClr val="1D291C"/>
                 </a:solidFill>
                 <a:latin typeface="Arimo"/>
               </a:defRPr>
@@ -6611,7 +6553,7 @@
             <a:r>
               <a:rPr sz="1800" b="1" i="0">
                 <a:solidFill>
-                  <a:srgbClr val="2C3440"/>
+                  <a:srgbClr val="1D291C"/>
                 </a:solidFill>
                 <a:latin typeface="Arimo"/>
               </a:rPr>
@@ -6809,7 +6751,7 @@
               </a:lnSpc>
               <a:defRPr sz="2600" b="1" i="0">
                 <a:solidFill>
-                  <a:srgbClr val="2C3440"/>
+                  <a:srgbClr val="1D291C"/>
                 </a:solidFill>
                 <a:latin typeface="Arimo"/>
               </a:defRPr>
@@ -6817,7 +6759,7 @@
             <a:r>
               <a:rPr sz="2600" b="1" i="0">
                 <a:solidFill>
-                  <a:srgbClr val="2C3440"/>
+                  <a:srgbClr val="1D291C"/>
                 </a:solidFill>
                 <a:latin typeface="Arimo"/>
               </a:rPr>
@@ -6989,7 +6931,7 @@
               </a:lnSpc>
               <a:defRPr sz="1800" b="1" i="0">
                 <a:solidFill>
-                  <a:srgbClr val="2C3440"/>
+                  <a:srgbClr val="1D291C"/>
                 </a:solidFill>
                 <a:latin typeface="Arimo"/>
               </a:defRPr>
@@ -6997,7 +6939,7 @@
             <a:r>
               <a:rPr sz="1800" b="1" i="0">
                 <a:solidFill>
-                  <a:srgbClr val="2C3440"/>
+                  <a:srgbClr val="1D291C"/>
                 </a:solidFill>
                 <a:latin typeface="Arimo"/>
               </a:rPr>
@@ -7169,7 +7111,7 @@
               </a:lnSpc>
               <a:defRPr sz="1800" b="1" i="0">
                 <a:solidFill>
-                  <a:srgbClr val="2C3440"/>
+                  <a:srgbClr val="1D291C"/>
                 </a:solidFill>
                 <a:latin typeface="Arimo"/>
               </a:defRPr>
@@ -7177,7 +7119,7 @@
             <a:r>
               <a:rPr sz="1800" b="1" i="0">
                 <a:solidFill>
-                  <a:srgbClr val="2C3440"/>
+                  <a:srgbClr val="1D291C"/>
                 </a:solidFill>
                 <a:latin typeface="Arimo"/>
               </a:rPr>
@@ -7349,7 +7291,7 @@
               </a:lnSpc>
               <a:defRPr sz="1800" b="1" i="0">
                 <a:solidFill>
-                  <a:srgbClr val="2C3440"/>
+                  <a:srgbClr val="1D291C"/>
                 </a:solidFill>
                 <a:latin typeface="Arimo"/>
               </a:defRPr>
@@ -7357,7 +7299,7 @@
             <a:r>
               <a:rPr sz="1800" b="1" i="0">
                 <a:solidFill>
-                  <a:srgbClr val="2C3440"/>
+                  <a:srgbClr val="1D291C"/>
                 </a:solidFill>
                 <a:latin typeface="Arimo"/>
               </a:rPr>
@@ -7555,7 +7497,7 @@
               </a:lnSpc>
               <a:defRPr sz="2600" b="1" i="0">
                 <a:solidFill>
-                  <a:srgbClr val="2C3440"/>
+                  <a:srgbClr val="1D291C"/>
                 </a:solidFill>
                 <a:latin typeface="Arimo"/>
               </a:defRPr>
@@ -7563,7 +7505,7 @@
             <a:r>
               <a:rPr sz="2600" b="1" i="0">
                 <a:solidFill>
-                  <a:srgbClr val="2C3440"/>
+                  <a:srgbClr val="1D291C"/>
                 </a:solidFill>
                 <a:latin typeface="Arimo"/>
               </a:rPr>

--- a/06_render/out/deck_retinoids_v2.pptx
+++ b/06_render/out/deck_retinoids_v2.pptx
@@ -3223,7 +3223,7 @@
               </a:lnSpc>
               <a:defRPr sz="3600" b="1" i="0">
                 <a:solidFill>
-                  <a:srgbClr val="1D291C"/>
+                  <a:srgbClr val="2C3440"/>
                 </a:solidFill>
                 <a:latin typeface="Arimo"/>
               </a:defRPr>
@@ -3231,7 +3231,7 @@
             <a:r>
               <a:rPr sz="3600" b="1" i="0">
                 <a:solidFill>
-                  <a:srgbClr val="1D291C"/>
+                  <a:srgbClr val="2C3440"/>
                 </a:solidFill>
                 <a:latin typeface="Arimo"/>
               </a:rPr>
@@ -3490,7 +3490,7 @@
               </a:lnSpc>
               <a:defRPr sz="2600" b="1" i="0">
                 <a:solidFill>
-                  <a:srgbClr val="1D291C"/>
+                  <a:srgbClr val="2C3440"/>
                 </a:solidFill>
                 <a:latin typeface="Arimo"/>
               </a:defRPr>
@@ -3498,7 +3498,7 @@
             <a:r>
               <a:rPr sz="2600" b="1" i="0">
                 <a:solidFill>
-                  <a:srgbClr val="1D291C"/>
+                  <a:srgbClr val="2C3440"/>
                 </a:solidFill>
                 <a:latin typeface="Arimo"/>
               </a:rPr>
@@ -3856,7 +3856,7 @@
               </a:lnSpc>
               <a:defRPr sz="3600" b="1" i="0">
                 <a:solidFill>
-                  <a:srgbClr val="1D291C"/>
+                  <a:srgbClr val="2C3440"/>
                 </a:solidFill>
                 <a:latin typeface="Arimo"/>
               </a:defRPr>
@@ -3864,7 +3864,7 @@
             <a:r>
               <a:rPr sz="3600" b="1" i="0">
                 <a:solidFill>
-                  <a:srgbClr val="1D291C"/>
+                  <a:srgbClr val="2C3440"/>
                 </a:solidFill>
                 <a:latin typeface="Arimo"/>
               </a:rPr>
@@ -4062,7 +4062,7 @@
               </a:lnSpc>
               <a:defRPr sz="2600" b="1" i="0">
                 <a:solidFill>
-                  <a:srgbClr val="1D291C"/>
+                  <a:srgbClr val="2C3440"/>
                 </a:solidFill>
                 <a:latin typeface="Arimo"/>
               </a:defRPr>
@@ -4070,7 +4070,7 @@
             <a:r>
               <a:rPr sz="2600" b="1" i="0">
                 <a:solidFill>
-                  <a:srgbClr val="1D291C"/>
+                  <a:srgbClr val="2C3440"/>
                 </a:solidFill>
                 <a:latin typeface="Arimo"/>
               </a:rPr>
@@ -4337,7 +4337,7 @@
               </a:lnSpc>
               <a:defRPr sz="2600" b="1" i="0">
                 <a:solidFill>
-                  <a:srgbClr val="1D291C"/>
+                  <a:srgbClr val="2C3440"/>
                 </a:solidFill>
                 <a:latin typeface="Arimo"/>
               </a:defRPr>
@@ -4345,7 +4345,7 @@
             <a:r>
               <a:rPr sz="2600" b="1" i="0">
                 <a:solidFill>
-                  <a:srgbClr val="1D291C"/>
+                  <a:srgbClr val="2C3440"/>
                 </a:solidFill>
                 <a:latin typeface="Arimo"/>
               </a:rPr>
@@ -4531,7 +4531,7 @@
               </a:lnSpc>
               <a:defRPr sz="1400" b="1" i="0">
                 <a:solidFill>
-                  <a:srgbClr val="1D291C"/>
+                  <a:srgbClr val="2C3440"/>
                 </a:solidFill>
                 <a:latin typeface="Arimo"/>
               </a:defRPr>
@@ -4539,7 +4539,7 @@
             <a:r>
               <a:rPr sz="1400" b="1" i="0">
                 <a:solidFill>
-                  <a:srgbClr val="1D291C"/>
+                  <a:srgbClr val="2C3440"/>
                 </a:solidFill>
                 <a:latin typeface="Arimo"/>
               </a:rPr>
@@ -4725,7 +4725,7 @@
               </a:lnSpc>
               <a:defRPr sz="1400" b="1" i="0">
                 <a:solidFill>
-                  <a:srgbClr val="1D291C"/>
+                  <a:srgbClr val="2C3440"/>
                 </a:solidFill>
                 <a:latin typeface="Arimo"/>
               </a:defRPr>
@@ -4733,7 +4733,7 @@
             <a:r>
               <a:rPr sz="1400" b="1" i="0">
                 <a:solidFill>
-                  <a:srgbClr val="1D291C"/>
+                  <a:srgbClr val="2C3440"/>
                 </a:solidFill>
                 <a:latin typeface="Arimo"/>
               </a:rPr>
@@ -4919,7 +4919,7 @@
               </a:lnSpc>
               <a:defRPr sz="1400" b="1" i="0">
                 <a:solidFill>
-                  <a:srgbClr val="1D291C"/>
+                  <a:srgbClr val="2C3440"/>
                 </a:solidFill>
                 <a:latin typeface="Arimo"/>
               </a:defRPr>
@@ -4927,7 +4927,7 @@
             <a:r>
               <a:rPr sz="1400" b="1" i="0">
                 <a:solidFill>
-                  <a:srgbClr val="1D291C"/>
+                  <a:srgbClr val="2C3440"/>
                 </a:solidFill>
                 <a:latin typeface="Arimo"/>
               </a:rPr>
@@ -5113,7 +5113,7 @@
               </a:lnSpc>
               <a:defRPr sz="1400" b="1" i="0">
                 <a:solidFill>
-                  <a:srgbClr val="1D291C"/>
+                  <a:srgbClr val="2C3440"/>
                 </a:solidFill>
                 <a:latin typeface="Arimo"/>
               </a:defRPr>
@@ -5121,7 +5121,7 @@
             <a:r>
               <a:rPr sz="1400" b="1" i="0">
                 <a:solidFill>
-                  <a:srgbClr val="1D291C"/>
+                  <a:srgbClr val="2C3440"/>
                 </a:solidFill>
                 <a:latin typeface="Arimo"/>
               </a:rPr>
@@ -5319,7 +5319,7 @@
               </a:lnSpc>
               <a:defRPr sz="2600" b="1" i="0">
                 <a:solidFill>
-                  <a:srgbClr val="1D291C"/>
+                  <a:srgbClr val="2C3440"/>
                 </a:solidFill>
                 <a:latin typeface="Arimo"/>
               </a:defRPr>
@@ -5327,7 +5327,7 @@
             <a:r>
               <a:rPr sz="2600" b="1" i="0">
                 <a:solidFill>
-                  <a:srgbClr val="1D291C"/>
+                  <a:srgbClr val="2C3440"/>
                 </a:solidFill>
                 <a:latin typeface="Arimo"/>
               </a:rPr>
@@ -5664,7 +5664,7 @@
               </a:lnSpc>
               <a:defRPr sz="2600" b="1" i="0">
                 <a:solidFill>
-                  <a:srgbClr val="1D291C"/>
+                  <a:srgbClr val="2C3440"/>
                 </a:solidFill>
                 <a:latin typeface="Arimo"/>
               </a:defRPr>
@@ -5672,7 +5672,7 @@
             <a:r>
               <a:rPr sz="2600" b="1" i="0">
                 <a:solidFill>
-                  <a:srgbClr val="1D291C"/>
+                  <a:srgbClr val="2C3440"/>
                 </a:solidFill>
                 <a:latin typeface="Arimo"/>
               </a:rPr>
@@ -6140,7 +6140,7 @@
               </a:lnSpc>
               <a:defRPr sz="2600" b="1" i="0">
                 <a:solidFill>
-                  <a:srgbClr val="1D291C"/>
+                  <a:srgbClr val="2C3440"/>
                 </a:solidFill>
                 <a:latin typeface="Arimo"/>
               </a:defRPr>
@@ -6148,7 +6148,7 @@
             <a:r>
               <a:rPr sz="2600" b="1" i="0">
                 <a:solidFill>
-                  <a:srgbClr val="1D291C"/>
+                  <a:srgbClr val="2C3440"/>
                 </a:solidFill>
                 <a:latin typeface="Arimo"/>
               </a:rPr>
@@ -6275,7 +6275,7 @@
               </a:lnSpc>
               <a:defRPr sz="1800" b="1" i="0">
                 <a:solidFill>
-                  <a:srgbClr val="1D291C"/>
+                  <a:srgbClr val="2C3440"/>
                 </a:solidFill>
                 <a:latin typeface="Arimo"/>
               </a:defRPr>
@@ -6283,7 +6283,7 @@
             <a:r>
               <a:rPr sz="1800" b="1" i="0">
                 <a:solidFill>
-                  <a:srgbClr val="1D291C"/>
+                  <a:srgbClr val="2C3440"/>
                 </a:solidFill>
                 <a:latin typeface="Arimo"/>
               </a:rPr>
@@ -6410,7 +6410,7 @@
               </a:lnSpc>
               <a:defRPr sz="1800" b="1" i="0">
                 <a:solidFill>
-                  <a:srgbClr val="1D291C"/>
+                  <a:srgbClr val="2C3440"/>
                 </a:solidFill>
                 <a:latin typeface="Arimo"/>
               </a:defRPr>
@@ -6418,7 +6418,7 @@
             <a:r>
               <a:rPr sz="1800" b="1" i="0">
                 <a:solidFill>
-                  <a:srgbClr val="1D291C"/>
+                  <a:srgbClr val="2C3440"/>
                 </a:solidFill>
                 <a:latin typeface="Arimo"/>
               </a:rPr>
@@ -6545,7 +6545,7 @@
               </a:lnSpc>
               <a:defRPr sz="1800" b="1" i="0">
                 <a:solidFill>
-                  <a:srgbClr val="1D291C"/>
+                  <a:srgbClr val="2C3440"/>
                 </a:solidFill>
                 <a:latin typeface="Arimo"/>
               </a:defRPr>
@@ -6553,7 +6553,7 @@
             <a:r>
               <a:rPr sz="1800" b="1" i="0">
                 <a:solidFill>
-                  <a:srgbClr val="1D291C"/>
+                  <a:srgbClr val="2C3440"/>
                 </a:solidFill>
                 <a:latin typeface="Arimo"/>
               </a:rPr>
@@ -6751,7 +6751,7 @@
               </a:lnSpc>
               <a:defRPr sz="2600" b="1" i="0">
                 <a:solidFill>
-                  <a:srgbClr val="1D291C"/>
+                  <a:srgbClr val="2C3440"/>
                 </a:solidFill>
                 <a:latin typeface="Arimo"/>
               </a:defRPr>
@@ -6759,7 +6759,7 @@
             <a:r>
               <a:rPr sz="2600" b="1" i="0">
                 <a:solidFill>
-                  <a:srgbClr val="1D291C"/>
+                  <a:srgbClr val="2C3440"/>
                 </a:solidFill>
                 <a:latin typeface="Arimo"/>
               </a:rPr>
@@ -6931,7 +6931,7 @@
               </a:lnSpc>
               <a:defRPr sz="1800" b="1" i="0">
                 <a:solidFill>
-                  <a:srgbClr val="1D291C"/>
+                  <a:srgbClr val="2C3440"/>
                 </a:solidFill>
                 <a:latin typeface="Arimo"/>
               </a:defRPr>
@@ -6939,7 +6939,7 @@
             <a:r>
               <a:rPr sz="1800" b="1" i="0">
                 <a:solidFill>
-                  <a:srgbClr val="1D291C"/>
+                  <a:srgbClr val="2C3440"/>
                 </a:solidFill>
                 <a:latin typeface="Arimo"/>
               </a:rPr>
@@ -7111,7 +7111,7 @@
               </a:lnSpc>
               <a:defRPr sz="1800" b="1" i="0">
                 <a:solidFill>
-                  <a:srgbClr val="1D291C"/>
+                  <a:srgbClr val="2C3440"/>
                 </a:solidFill>
                 <a:latin typeface="Arimo"/>
               </a:defRPr>
@@ -7119,7 +7119,7 @@
             <a:r>
               <a:rPr sz="1800" b="1" i="0">
                 <a:solidFill>
-                  <a:srgbClr val="1D291C"/>
+                  <a:srgbClr val="2C3440"/>
                 </a:solidFill>
                 <a:latin typeface="Arimo"/>
               </a:rPr>
@@ -7291,7 +7291,7 @@
               </a:lnSpc>
               <a:defRPr sz="1800" b="1" i="0">
                 <a:solidFill>
-                  <a:srgbClr val="1D291C"/>
+                  <a:srgbClr val="2C3440"/>
                 </a:solidFill>
                 <a:latin typeface="Arimo"/>
               </a:defRPr>
@@ -7299,7 +7299,7 @@
             <a:r>
               <a:rPr sz="1800" b="1" i="0">
                 <a:solidFill>
-                  <a:srgbClr val="1D291C"/>
+                  <a:srgbClr val="2C3440"/>
                 </a:solidFill>
                 <a:latin typeface="Arimo"/>
               </a:rPr>
@@ -7497,7 +7497,7 @@
               </a:lnSpc>
               <a:defRPr sz="2600" b="1" i="0">
                 <a:solidFill>
-                  <a:srgbClr val="1D291C"/>
+                  <a:srgbClr val="2C3440"/>
                 </a:solidFill>
                 <a:latin typeface="Arimo"/>
               </a:defRPr>
@@ -7505,7 +7505,7 @@
             <a:r>
               <a:rPr sz="2600" b="1" i="0">
                 <a:solidFill>
-                  <a:srgbClr val="1D291C"/>
+                  <a:srgbClr val="2C3440"/>
                 </a:solidFill>
                 <a:latin typeface="Arimo"/>
               </a:rPr>

--- a/06_render/out/deck_retinoids_v2.pptx
+++ b/06_render/out/deck_retinoids_v2.pptx
@@ -4304,7 +4304,7 @@
                 </a:solidFill>
                 <a:latin typeface="Arimo"/>
               </a:rPr>
-              <a:t>Источники: fact_0002, fact_0004, fact_0011</a:t>
+              <a:t>Источники: fact_0001, fact_0004, fact_0011</a:t>
             </a:r>
           </a:p>
         </p:txBody>
@@ -5170,7 +5170,7 @@
                 </a:solidFill>
                 <a:latin typeface="Arimo"/>
               </a:rPr>
-              <a:t>Активный третиноин, связывается напрямую с рецепторами.</a:t>
+              <a:t>Активный третиноин, опосредует свое действие через рецепторы RAR/RXR.</a:t>
             </a:r>
           </a:p>
         </p:txBody>
@@ -5286,7 +5286,7 @@
                 </a:solidFill>
                 <a:latin typeface="Arimo"/>
               </a:rPr>
-              <a:t>Источники: fact_0002, fact_0005, fact_0006</a:t>
+              <a:t>Источники: fact_0001, fact_0005, fact_0006</a:t>
             </a:r>
           </a:p>
         </p:txBody>
@@ -5421,7 +5421,7 @@
                 </a:solidFill>
                 <a:latin typeface="Arimo"/>
               </a:rPr>
-              <a:t>• Третиноин связывается напрямую с рецепторами rars без метаболической конверсии.</a:t>
+              <a:t>• Действие третиноина в кератиноцитах опосредовано связыванием с ядерными рецепторами RAR и RXR.</a:t>
             </a:r>
           </a:p>
           <a:p>

--- a/06_render/out/deck_retinoids_v2.pptx
+++ b/06_render/out/deck_retinoids_v2.pptx
@@ -3150,9 +3150,33 @@
           </a:p>
         </p:txBody>
       </p:sp>
-      <p:sp>
-        <p:nvSpPr>
-          <p:cNvPr id="3" name="TextBox 2"/>
+      <p:pic>
+        <p:nvPicPr>
+          <p:cNvPr id="3" name="Picture 2" descr="descriptor_2C3440.png"/>
+          <p:cNvPicPr>
+            <a:picLocks noChangeAspect="1"/>
+          </p:cNvPicPr>
+          <p:nvPr/>
+        </p:nvPicPr>
+        <p:blipFill>
+          <a:blip r:embed="rId2"/>
+          <a:stretch>
+            <a:fillRect/>
+          </a:stretch>
+        </p:blipFill>
+        <p:spPr>
+          <a:xfrm>
+            <a:off x="357187" y="3661171"/>
+            <a:ext cx="3107531" cy="776882"/>
+          </a:xfrm>
+          <a:prstGeom prst="rect">
+            <a:avLst/>
+          </a:prstGeom>
+        </p:spPr>
+      </p:pic>
+      <p:sp>
+        <p:nvSpPr>
+          <p:cNvPr id="4" name="TextBox 3"/>
           <p:cNvSpPr txBox="1"/>
           <p:nvPr/>
         </p:nvSpPr>
@@ -3197,7 +3221,7 @@
       </p:sp>
       <p:sp>
         <p:nvSpPr>
-          <p:cNvPr id="4" name="TextBox 3"/>
+          <p:cNvPr id="5" name="TextBox 4"/>
           <p:cNvSpPr txBox="1"/>
           <p:nvPr/>
         </p:nvSpPr>
@@ -3242,7 +3266,7 @@
       </p:sp>
       <p:sp>
         <p:nvSpPr>
-          <p:cNvPr id="5" name="TextBox 4"/>
+          <p:cNvPr id="6" name="TextBox 5"/>
           <p:cNvSpPr txBox="1"/>
           <p:nvPr/>
         </p:nvSpPr>
@@ -3287,7 +3311,7 @@
       </p:sp>
       <p:sp>
         <p:nvSpPr>
-          <p:cNvPr id="6" name="Rounded Rectangle 5"/>
+          <p:cNvPr id="7" name="Rounded Rectangle 6"/>
           <p:cNvSpPr/>
           <p:nvPr/>
         </p:nvSpPr>
@@ -3380,7 +3404,7 @@
         </p:nvSpPr>
         <p:spPr>
           <a:xfrm>
-            <a:off x="357187" y="4643437"/>
+            <a:off x="357187" y="4464843"/>
             <a:ext cx="4572000" cy="274320"/>
           </a:xfrm>
           <a:prstGeom prst="rect">
@@ -3425,7 +3449,7 @@
         </p:nvSpPr>
         <p:spPr>
           <a:xfrm>
-            <a:off x="5029200" y="4643437"/>
+            <a:off x="5029200" y="4464843"/>
             <a:ext cx="3749039" cy="274320"/>
           </a:xfrm>
           <a:prstGeom prst="rect">
@@ -3464,115 +3488,23 @@
       </p:sp>
       <p:sp>
         <p:nvSpPr>
-          <p:cNvPr id="4" name="TextBox 3"/>
-          <p:cNvSpPr txBox="1"/>
-          <p:nvPr/>
-        </p:nvSpPr>
-        <p:spPr>
-          <a:xfrm>
-            <a:off x="357187" y="357187"/>
-            <a:ext cx="8429625" cy="401835"/>
-          </a:xfrm>
-          <a:prstGeom prst="rect">
-            <a:avLst/>
-          </a:prstGeom>
-          <a:noFill/>
-        </p:spPr>
-        <p:txBody>
-          <a:bodyPr wrap="square" tIns="0" bIns="0" lIns="0" rIns="0">
-            <a:spAutoFit/>
-          </a:bodyPr>
-          <a:lstStyle/>
-          <a:p>
-            <a:pPr algn="l">
-              <a:lnSpc>
-                <a:spcPct val="120000"/>
-              </a:lnSpc>
-              <a:defRPr sz="2600" b="1" i="0">
-                <a:solidFill>
-                  <a:srgbClr val="2C3440"/>
-                </a:solidFill>
-                <a:latin typeface="Arimo"/>
-              </a:defRPr>
-            </a:pPr>
-            <a:r>
-              <a:rPr sz="2600" b="1" i="0">
-                <a:solidFill>
-                  <a:srgbClr val="2C3440"/>
-                </a:solidFill>
-                <a:latin typeface="Arimo"/>
-              </a:rPr>
-              <a:t>Терапевтические Выводы</a:t>
-            </a:r>
-          </a:p>
-        </p:txBody>
-      </p:sp>
-      <p:sp>
-        <p:nvSpPr>
-          <p:cNvPr id="5" name="TextBox 4"/>
-          <p:cNvSpPr txBox="1"/>
-          <p:nvPr/>
-        </p:nvSpPr>
-        <p:spPr>
-          <a:xfrm>
-            <a:off x="357187" y="803671"/>
-            <a:ext cx="8429625" cy="267890"/>
-          </a:xfrm>
-          <a:prstGeom prst="rect">
-            <a:avLst/>
-          </a:prstGeom>
-          <a:noFill/>
-        </p:spPr>
-        <p:txBody>
-          <a:bodyPr wrap="square" tIns="0" bIns="0" lIns="0" rIns="0">
-            <a:spAutoFit/>
-          </a:bodyPr>
-          <a:lstStyle/>
-          <a:p>
-            <a:pPr algn="l">
-              <a:lnSpc>
-                <a:spcPct val="120000"/>
-              </a:lnSpc>
-              <a:defRPr sz="1500" b="0" i="0">
-                <a:solidFill>
-                  <a:srgbClr val="6D8470"/>
-                </a:solidFill>
-                <a:latin typeface="Arimo"/>
-              </a:defRPr>
-            </a:pPr>
-            <a:r>
-              <a:rPr sz="1500" b="0" i="0">
-                <a:solidFill>
-                  <a:srgbClr val="6D8470"/>
-                </a:solidFill>
-                <a:latin typeface="Arimo"/>
-              </a:rPr>
-              <a:t>Сводное резюме клинических рекомендаций по ретиноидам</a:t>
-            </a:r>
-          </a:p>
-        </p:txBody>
-      </p:sp>
-      <p:sp>
-        <p:nvSpPr>
-          <p:cNvPr id="6" name="Rounded Rectangle 5"/>
+          <p:cNvPr id="4" name="Rectangle 3"/>
           <p:cNvSpPr/>
           <p:nvPr/>
         </p:nvSpPr>
         <p:spPr>
           <a:xfrm>
-            <a:off x="357187" y="1303734"/>
-            <a:ext cx="8430768" cy="2857500"/>
-          </a:xfrm>
-          <a:prstGeom prst="roundRect">
+            <a:off x="357187" y="4732734"/>
+            <a:ext cx="8429625" cy="8929"/>
+          </a:xfrm>
+          <a:prstGeom prst="rect">
             <a:avLst/>
           </a:prstGeom>
           <a:solidFill>
-            <a:srgbClr val="E6D2CA"/>
+            <a:srgbClr val="D7E0CE"/>
           </a:solidFill>
-          <a:ln w="12700">
-            <a:solidFill>
-              <a:srgbClr val="D7E0CE"/>
-            </a:solidFill>
+          <a:ln>
+            <a:noFill/>
           </a:ln>
         </p:spPr>
         <p:style>
@@ -3597,16 +3529,40 @@
           </a:p>
         </p:txBody>
       </p:sp>
-      <p:sp>
-        <p:nvSpPr>
-          <p:cNvPr id="7" name="TextBox 6"/>
+      <p:pic>
+        <p:nvPicPr>
+          <p:cNvPr id="5" name="Picture 4" descr="mark_6D8470.png"/>
+          <p:cNvPicPr>
+            <a:picLocks noChangeAspect="1"/>
+          </p:cNvPicPr>
+          <p:nvPr/>
+        </p:nvPicPr>
+        <p:blipFill>
+          <a:blip r:embed="rId2"/>
+          <a:stretch>
+            <a:fillRect/>
+          </a:stretch>
+        </p:blipFill>
+        <p:spPr>
+          <a:xfrm>
+            <a:off x="357187" y="4848820"/>
+            <a:ext cx="178593" cy="178593"/>
+          </a:xfrm>
+          <a:prstGeom prst="rect">
+            <a:avLst/>
+          </a:prstGeom>
+        </p:spPr>
+      </p:pic>
+      <p:sp>
+        <p:nvSpPr>
+          <p:cNvPr id="6" name="TextBox 5"/>
           <p:cNvSpPr txBox="1"/>
           <p:nvPr/>
         </p:nvSpPr>
         <p:spPr>
           <a:xfrm>
-            <a:off x="640080" y="1580554"/>
-            <a:ext cx="7863840" cy="2286000"/>
+            <a:off x="607218" y="4830960"/>
+            <a:ext cx="1785937" cy="178593"/>
           </a:xfrm>
           <a:prstGeom prst="rect">
             <a:avLst/>
@@ -3623,8 +3579,233 @@
               <a:lnSpc>
                 <a:spcPct val="120000"/>
               </a:lnSpc>
+              <a:defRPr sz="1100" b="1" i="0">
+                <a:solidFill>
+                  <a:srgbClr val="3D4A40"/>
+                </a:solidFill>
+                <a:latin typeface="Arimo"/>
+              </a:defRPr>
+            </a:pPr>
+            <a:r>
+              <a:rPr sz="1100" b="1" i="0">
+                <a:solidFill>
+                  <a:srgbClr val="3D4A40"/>
+                </a:solidFill>
+                <a:latin typeface="Arimo"/>
+              </a:rPr>
+              <a:t>YM PROSKIN</a:t>
+            </a:r>
+          </a:p>
+        </p:txBody>
+      </p:sp>
+      <p:sp>
+        <p:nvSpPr>
+          <p:cNvPr id="7" name="TextBox 6"/>
+          <p:cNvSpPr txBox="1"/>
+          <p:nvPr/>
+        </p:nvSpPr>
+        <p:spPr>
+          <a:xfrm>
+            <a:off x="8251031" y="4830960"/>
+            <a:ext cx="535781" cy="178593"/>
+          </a:xfrm>
+          <a:prstGeom prst="rect">
+            <a:avLst/>
+          </a:prstGeom>
+          <a:noFill/>
+        </p:spPr>
+        <p:txBody>
+          <a:bodyPr wrap="square" tIns="0" bIns="0" lIns="0" rIns="0">
+            <a:spAutoFit/>
+          </a:bodyPr>
+          <a:lstStyle/>
+          <a:p>
+            <a:pPr algn="r">
+              <a:lnSpc>
+                <a:spcPct val="120000"/>
+              </a:lnSpc>
+              <a:defRPr sz="1100" b="0" i="0">
+                <a:solidFill>
+                  <a:srgbClr val="6D8470"/>
+                </a:solidFill>
+                <a:latin typeface="Arimo"/>
+              </a:defRPr>
+            </a:pPr>
+            <a:r>
+              <a:rPr sz="1100" b="0" i="0">
+                <a:solidFill>
+                  <a:srgbClr val="6D8470"/>
+                </a:solidFill>
+                <a:latin typeface="Arimo"/>
+              </a:rPr>
+              <a:t>10</a:t>
+            </a:r>
+          </a:p>
+        </p:txBody>
+      </p:sp>
+      <p:sp>
+        <p:nvSpPr>
+          <p:cNvPr id="8" name="TextBox 7"/>
+          <p:cNvSpPr txBox="1"/>
+          <p:nvPr/>
+        </p:nvSpPr>
+        <p:spPr>
+          <a:xfrm>
+            <a:off x="357187" y="357187"/>
+            <a:ext cx="8429625" cy="401835"/>
+          </a:xfrm>
+          <a:prstGeom prst="rect">
+            <a:avLst/>
+          </a:prstGeom>
+          <a:noFill/>
+        </p:spPr>
+        <p:txBody>
+          <a:bodyPr wrap="square" tIns="0" bIns="0" lIns="0" rIns="0">
+            <a:spAutoFit/>
+          </a:bodyPr>
+          <a:lstStyle/>
+          <a:p>
+            <a:pPr algn="l">
+              <a:lnSpc>
+                <a:spcPct val="120000"/>
+              </a:lnSpc>
+              <a:defRPr sz="2600" b="1" i="0">
+                <a:solidFill>
+                  <a:srgbClr val="2C3440"/>
+                </a:solidFill>
+                <a:latin typeface="Arimo"/>
+              </a:defRPr>
+            </a:pPr>
+            <a:r>
+              <a:rPr sz="2600" b="1" i="0">
+                <a:solidFill>
+                  <a:srgbClr val="2C3440"/>
+                </a:solidFill>
+                <a:latin typeface="Arimo"/>
+              </a:rPr>
+              <a:t>Терапевтические Выводы</a:t>
+            </a:r>
+          </a:p>
+        </p:txBody>
+      </p:sp>
+      <p:sp>
+        <p:nvSpPr>
+          <p:cNvPr id="9" name="TextBox 8"/>
+          <p:cNvSpPr txBox="1"/>
+          <p:nvPr/>
+        </p:nvSpPr>
+        <p:spPr>
+          <a:xfrm>
+            <a:off x="357187" y="803671"/>
+            <a:ext cx="8429625" cy="267890"/>
+          </a:xfrm>
+          <a:prstGeom prst="rect">
+            <a:avLst/>
+          </a:prstGeom>
+          <a:noFill/>
+        </p:spPr>
+        <p:txBody>
+          <a:bodyPr wrap="square" tIns="0" bIns="0" lIns="0" rIns="0">
+            <a:spAutoFit/>
+          </a:bodyPr>
+          <a:lstStyle/>
+          <a:p>
+            <a:pPr algn="l">
+              <a:lnSpc>
+                <a:spcPct val="120000"/>
+              </a:lnSpc>
               <a:defRPr sz="1500" b="0" i="0">
                 <a:solidFill>
+                  <a:srgbClr val="6D8470"/>
+                </a:solidFill>
+                <a:latin typeface="Arimo"/>
+              </a:defRPr>
+            </a:pPr>
+            <a:r>
+              <a:rPr sz="1500" b="0" i="0">
+                <a:solidFill>
+                  <a:srgbClr val="6D8470"/>
+                </a:solidFill>
+                <a:latin typeface="Arimo"/>
+              </a:rPr>
+              <a:t>Сводное резюме клинических рекомендаций по ретиноидам</a:t>
+            </a:r>
+          </a:p>
+        </p:txBody>
+      </p:sp>
+      <p:sp>
+        <p:nvSpPr>
+          <p:cNvPr id="10" name="Rounded Rectangle 9"/>
+          <p:cNvSpPr/>
+          <p:nvPr/>
+        </p:nvSpPr>
+        <p:spPr>
+          <a:xfrm>
+            <a:off x="357187" y="1303734"/>
+            <a:ext cx="8430768" cy="2857500"/>
+          </a:xfrm>
+          <a:prstGeom prst="roundRect">
+            <a:avLst/>
+          </a:prstGeom>
+          <a:solidFill>
+            <a:srgbClr val="E6D2CA"/>
+          </a:solidFill>
+          <a:ln w="12700">
+            <a:solidFill>
+              <a:srgbClr val="D7E0CE"/>
+            </a:solidFill>
+          </a:ln>
+        </p:spPr>
+        <p:style>
+          <a:lnRef idx="1">
+            <a:schemeClr val="accent1"/>
+          </a:lnRef>
+          <a:fillRef idx="3">
+            <a:schemeClr val="accent1"/>
+          </a:fillRef>
+          <a:effectRef idx="2">
+            <a:schemeClr val="accent1"/>
+          </a:effectRef>
+          <a:fontRef idx="minor">
+            <a:schemeClr val="lt1"/>
+          </a:fontRef>
+        </p:style>
+        <p:txBody>
+          <a:bodyPr rtlCol="0" anchor="ctr"/>
+          <a:lstStyle/>
+          <a:p>
+            <a:pPr algn="ctr"/>
+          </a:p>
+        </p:txBody>
+      </p:sp>
+      <p:sp>
+        <p:nvSpPr>
+          <p:cNvPr id="11" name="TextBox 10"/>
+          <p:cNvSpPr txBox="1"/>
+          <p:nvPr/>
+        </p:nvSpPr>
+        <p:spPr>
+          <a:xfrm>
+            <a:off x="640080" y="1580554"/>
+            <a:ext cx="7863840" cy="2286000"/>
+          </a:xfrm>
+          <a:prstGeom prst="rect">
+            <a:avLst/>
+          </a:prstGeom>
+          <a:noFill/>
+        </p:spPr>
+        <p:txBody>
+          <a:bodyPr wrap="square" tIns="0" bIns="0" lIns="0" rIns="0">
+            <a:spAutoFit/>
+          </a:bodyPr>
+          <a:lstStyle/>
+          <a:p>
+            <a:pPr algn="l">
+              <a:lnSpc>
+                <a:spcPct val="120000"/>
+              </a:lnSpc>
+              <a:defRPr sz="1500" b="0" i="0">
+                <a:solidFill>
                   <a:srgbClr val="3D4A40"/>
                 </a:solidFill>
                 <a:latin typeface="Arimo"/>
@@ -3712,6 +3893,30 @@
           </a:p>
         </p:txBody>
       </p:sp>
+      <p:pic>
+        <p:nvPicPr>
+          <p:cNvPr id="12" name="Picture 11" descr="badge_2C3440.png"/>
+          <p:cNvPicPr>
+            <a:picLocks noChangeAspect="1"/>
+          </p:cNvPicPr>
+          <p:nvPr/>
+        </p:nvPicPr>
+        <p:blipFill>
+          <a:blip r:embed="rId3"/>
+          <a:stretch>
+            <a:fillRect/>
+          </a:stretch>
+        </p:blipFill>
+        <p:spPr>
+          <a:xfrm>
+            <a:off x="3750468" y="1750218"/>
+            <a:ext cx="1643062" cy="1643062"/>
+          </a:xfrm>
+          <a:prstGeom prst="rect">
+            <a:avLst/>
+          </a:prstGeom>
+        </p:spPr>
+      </p:pic>
     </p:spTree>
   </p:cSld>
   <p:clrMapOvr>
@@ -3783,9 +3988,33 @@
           </a:p>
         </p:txBody>
       </p:sp>
-      <p:sp>
-        <p:nvSpPr>
-          <p:cNvPr id="3" name="TextBox 2"/>
+      <p:pic>
+        <p:nvPicPr>
+          <p:cNvPr id="3" name="Picture 2" descr="horizontal_2C3440.png"/>
+          <p:cNvPicPr>
+            <a:picLocks noChangeAspect="1"/>
+          </p:cNvPicPr>
+          <p:nvPr/>
+        </p:nvPicPr>
+        <p:blipFill>
+          <a:blip r:embed="rId2"/>
+          <a:stretch>
+            <a:fillRect/>
+          </a:stretch>
+        </p:blipFill>
+        <p:spPr>
+          <a:xfrm>
+            <a:off x="357187" y="982265"/>
+            <a:ext cx="2009179" cy="482203"/>
+          </a:xfrm>
+          <a:prstGeom prst="rect">
+            <a:avLst/>
+          </a:prstGeom>
+        </p:spPr>
+      </p:pic>
+      <p:sp>
+        <p:nvSpPr>
+          <p:cNvPr id="4" name="TextBox 3"/>
           <p:cNvSpPr txBox="1"/>
           <p:nvPr/>
         </p:nvSpPr>
@@ -3830,7 +4059,7 @@
       </p:sp>
       <p:sp>
         <p:nvSpPr>
-          <p:cNvPr id="4" name="TextBox 3"/>
+          <p:cNvPr id="5" name="TextBox 4"/>
           <p:cNvSpPr txBox="1"/>
           <p:nvPr/>
         </p:nvSpPr>
@@ -3875,7 +4104,7 @@
       </p:sp>
       <p:sp>
         <p:nvSpPr>
-          <p:cNvPr id="5" name="TextBox 4"/>
+          <p:cNvPr id="6" name="TextBox 5"/>
           <p:cNvSpPr txBox="1"/>
           <p:nvPr/>
         </p:nvSpPr>
@@ -3952,7 +4181,7 @@
         </p:nvSpPr>
         <p:spPr>
           <a:xfrm>
-            <a:off x="357187" y="4643437"/>
+            <a:off x="357187" y="4464843"/>
             <a:ext cx="4572000" cy="274320"/>
           </a:xfrm>
           <a:prstGeom prst="rect">
@@ -3997,7 +4226,7 @@
         </p:nvSpPr>
         <p:spPr>
           <a:xfrm>
-            <a:off x="5029200" y="4643437"/>
+            <a:off x="5029200" y="4464843"/>
             <a:ext cx="3749039" cy="274320"/>
           </a:xfrm>
           <a:prstGeom prst="rect">
@@ -4036,14 +4265,81 @@
       </p:sp>
       <p:sp>
         <p:nvSpPr>
-          <p:cNvPr id="4" name="TextBox 3"/>
+          <p:cNvPr id="4" name="Rectangle 3"/>
+          <p:cNvSpPr/>
+          <p:nvPr/>
+        </p:nvSpPr>
+        <p:spPr>
+          <a:xfrm>
+            <a:off x="357187" y="4732734"/>
+            <a:ext cx="8429625" cy="8929"/>
+          </a:xfrm>
+          <a:prstGeom prst="rect">
+            <a:avLst/>
+          </a:prstGeom>
+          <a:solidFill>
+            <a:srgbClr val="D7E0CE"/>
+          </a:solidFill>
+          <a:ln>
+            <a:noFill/>
+          </a:ln>
+        </p:spPr>
+        <p:style>
+          <a:lnRef idx="1">
+            <a:schemeClr val="accent1"/>
+          </a:lnRef>
+          <a:fillRef idx="3">
+            <a:schemeClr val="accent1"/>
+          </a:fillRef>
+          <a:effectRef idx="2">
+            <a:schemeClr val="accent1"/>
+          </a:effectRef>
+          <a:fontRef idx="minor">
+            <a:schemeClr val="lt1"/>
+          </a:fontRef>
+        </p:style>
+        <p:txBody>
+          <a:bodyPr rtlCol="0" anchor="ctr"/>
+          <a:lstStyle/>
+          <a:p>
+            <a:pPr algn="ctr"/>
+          </a:p>
+        </p:txBody>
+      </p:sp>
+      <p:pic>
+        <p:nvPicPr>
+          <p:cNvPr id="5" name="Picture 4" descr="mark_6D8470.png"/>
+          <p:cNvPicPr>
+            <a:picLocks noChangeAspect="1"/>
+          </p:cNvPicPr>
+          <p:nvPr/>
+        </p:nvPicPr>
+        <p:blipFill>
+          <a:blip r:embed="rId2"/>
+          <a:stretch>
+            <a:fillRect/>
+          </a:stretch>
+        </p:blipFill>
+        <p:spPr>
+          <a:xfrm>
+            <a:off x="357187" y="4848820"/>
+            <a:ext cx="178593" cy="178593"/>
+          </a:xfrm>
+          <a:prstGeom prst="rect">
+            <a:avLst/>
+          </a:prstGeom>
+        </p:spPr>
+      </p:pic>
+      <p:sp>
+        <p:nvSpPr>
+          <p:cNvPr id="6" name="TextBox 5"/>
           <p:cNvSpPr txBox="1"/>
           <p:nvPr/>
         </p:nvSpPr>
         <p:spPr>
           <a:xfrm>
-            <a:off x="357187" y="357187"/>
-            <a:ext cx="8429625" cy="401835"/>
+            <a:off x="607218" y="4830960"/>
+            <a:ext cx="1785937" cy="178593"/>
           </a:xfrm>
           <a:prstGeom prst="rect">
             <a:avLst/>
@@ -4060,35 +4356,35 @@
               <a:lnSpc>
                 <a:spcPct val="120000"/>
               </a:lnSpc>
-              <a:defRPr sz="2600" b="1" i="0">
-                <a:solidFill>
-                  <a:srgbClr val="2C3440"/>
-                </a:solidFill>
-                <a:latin typeface="Arimo"/>
-              </a:defRPr>
-            </a:pPr>
-            <a:r>
-              <a:rPr sz="2600" b="1" i="0">
-                <a:solidFill>
-                  <a:srgbClr val="2C3440"/>
-                </a:solidFill>
-                <a:latin typeface="Arimo"/>
-              </a:rPr>
-              <a:t>Ядерные Рецепторы</a:t>
-            </a:r>
-          </a:p>
-        </p:txBody>
-      </p:sp>
-      <p:sp>
-        <p:nvSpPr>
-          <p:cNvPr id="5" name="TextBox 4"/>
+              <a:defRPr sz="1100" b="1" i="0">
+                <a:solidFill>
+                  <a:srgbClr val="3D4A40"/>
+                </a:solidFill>
+                <a:latin typeface="Arimo"/>
+              </a:defRPr>
+            </a:pPr>
+            <a:r>
+              <a:rPr sz="1100" b="1" i="0">
+                <a:solidFill>
+                  <a:srgbClr val="3D4A40"/>
+                </a:solidFill>
+                <a:latin typeface="Arimo"/>
+              </a:rPr>
+              <a:t>YM PROSKIN</a:t>
+            </a:r>
+          </a:p>
+        </p:txBody>
+      </p:sp>
+      <p:sp>
+        <p:nvSpPr>
+          <p:cNvPr id="7" name="TextBox 6"/>
           <p:cNvSpPr txBox="1"/>
           <p:nvPr/>
         </p:nvSpPr>
         <p:spPr>
           <a:xfrm>
-            <a:off x="357187" y="803671"/>
-            <a:ext cx="8429625" cy="267890"/>
+            <a:off x="8251031" y="4830960"/>
+            <a:ext cx="535781" cy="178593"/>
           </a:xfrm>
           <a:prstGeom prst="rect">
             <a:avLst/>
@@ -4101,11 +4397,11 @@
           </a:bodyPr>
           <a:lstStyle/>
           <a:p>
-            <a:pPr algn="l">
-              <a:lnSpc>
-                <a:spcPct val="120000"/>
-              </a:lnSpc>
-              <a:defRPr sz="1500" b="0" i="0">
+            <a:pPr algn="r">
+              <a:lnSpc>
+                <a:spcPct val="120000"/>
+              </a:lnSpc>
+              <a:defRPr sz="1100" b="0" i="0">
                 <a:solidFill>
                   <a:srgbClr val="6D8470"/>
                 </a:solidFill>
@@ -4113,27 +4409,27 @@
               </a:defRPr>
             </a:pPr>
             <a:r>
-              <a:rPr sz="1500" b="0" i="0">
+              <a:rPr sz="1100" b="0" i="0">
                 <a:solidFill>
                   <a:srgbClr val="6D8470"/>
                 </a:solidFill>
                 <a:latin typeface="Arimo"/>
               </a:rPr>
-              <a:t>Основной путь транскрипции генов</a:t>
-            </a:r>
-          </a:p>
-        </p:txBody>
-      </p:sp>
-      <p:sp>
-        <p:nvSpPr>
-          <p:cNvPr id="6" name="TextBox 5"/>
+              <a:t>3</a:t>
+            </a:r>
+          </a:p>
+        </p:txBody>
+      </p:sp>
+      <p:sp>
+        <p:nvSpPr>
+          <p:cNvPr id="8" name="TextBox 7"/>
           <p:cNvSpPr txBox="1"/>
           <p:nvPr/>
         </p:nvSpPr>
         <p:spPr>
           <a:xfrm>
-            <a:off x="357187" y="1339453"/>
-            <a:ext cx="4572000" cy="2926080"/>
+            <a:off x="357187" y="357187"/>
+            <a:ext cx="8429625" cy="401835"/>
           </a:xfrm>
           <a:prstGeom prst="rect">
             <a:avLst/>
@@ -4150,6 +4446,96 @@
               <a:lnSpc>
                 <a:spcPct val="120000"/>
               </a:lnSpc>
+              <a:defRPr sz="2600" b="1" i="0">
+                <a:solidFill>
+                  <a:srgbClr val="2C3440"/>
+                </a:solidFill>
+                <a:latin typeface="Arimo"/>
+              </a:defRPr>
+            </a:pPr>
+            <a:r>
+              <a:rPr sz="2600" b="1" i="0">
+                <a:solidFill>
+                  <a:srgbClr val="2C3440"/>
+                </a:solidFill>
+                <a:latin typeface="Arimo"/>
+              </a:rPr>
+              <a:t>Ядерные Рецепторы</a:t>
+            </a:r>
+          </a:p>
+        </p:txBody>
+      </p:sp>
+      <p:sp>
+        <p:nvSpPr>
+          <p:cNvPr id="9" name="TextBox 8"/>
+          <p:cNvSpPr txBox="1"/>
+          <p:nvPr/>
+        </p:nvSpPr>
+        <p:spPr>
+          <a:xfrm>
+            <a:off x="357187" y="803671"/>
+            <a:ext cx="8429625" cy="267890"/>
+          </a:xfrm>
+          <a:prstGeom prst="rect">
+            <a:avLst/>
+          </a:prstGeom>
+          <a:noFill/>
+        </p:spPr>
+        <p:txBody>
+          <a:bodyPr wrap="square" tIns="0" bIns="0" lIns="0" rIns="0">
+            <a:spAutoFit/>
+          </a:bodyPr>
+          <a:lstStyle/>
+          <a:p>
+            <a:pPr algn="l">
+              <a:lnSpc>
+                <a:spcPct val="120000"/>
+              </a:lnSpc>
+              <a:defRPr sz="1500" b="0" i="0">
+                <a:solidFill>
+                  <a:srgbClr val="6D8470"/>
+                </a:solidFill>
+                <a:latin typeface="Arimo"/>
+              </a:defRPr>
+            </a:pPr>
+            <a:r>
+              <a:rPr sz="1500" b="0" i="0">
+                <a:solidFill>
+                  <a:srgbClr val="6D8470"/>
+                </a:solidFill>
+                <a:latin typeface="Arimo"/>
+              </a:rPr>
+              <a:t>Основной путь транскрипции генов</a:t>
+            </a:r>
+          </a:p>
+        </p:txBody>
+      </p:sp>
+      <p:sp>
+        <p:nvSpPr>
+          <p:cNvPr id="10" name="TextBox 9"/>
+          <p:cNvSpPr txBox="1"/>
+          <p:nvPr/>
+        </p:nvSpPr>
+        <p:spPr>
+          <a:xfrm>
+            <a:off x="357187" y="1339453"/>
+            <a:ext cx="4572000" cy="2926080"/>
+          </a:xfrm>
+          <a:prstGeom prst="rect">
+            <a:avLst/>
+          </a:prstGeom>
+          <a:noFill/>
+        </p:spPr>
+        <p:txBody>
+          <a:bodyPr wrap="square" tIns="0" bIns="0" lIns="0" rIns="0">
+            <a:spAutoFit/>
+          </a:bodyPr>
+          <a:lstStyle/>
+          <a:p>
+            <a:pPr algn="l">
+              <a:lnSpc>
+                <a:spcPct val="120000"/>
+              </a:lnSpc>
               <a:defRPr sz="1500" b="0" i="0">
                 <a:solidFill>
                   <a:srgbClr val="3D4A40"/>
@@ -4171,14 +4557,14 @@
       </p:sp>
       <p:pic>
         <p:nvPicPr>
-          <p:cNvPr id="7" name="Picture 6" descr="rar_rxr_mechanism.png"/>
+          <p:cNvPr id="11" name="Picture 10" descr="rar_rxr_mechanism.png"/>
           <p:cNvPicPr>
             <a:picLocks noChangeAspect="1"/>
           </p:cNvPicPr>
           <p:nvPr/>
         </p:nvPicPr>
         <p:blipFill>
-          <a:blip r:embed="rId2"/>
+          <a:blip r:embed="rId3"/>
           <a:stretch>
             <a:fillRect/>
           </a:stretch>
@@ -4227,7 +4613,7 @@
         </p:nvSpPr>
         <p:spPr>
           <a:xfrm>
-            <a:off x="357187" y="4643437"/>
+            <a:off x="357187" y="4464843"/>
             <a:ext cx="4572000" cy="274320"/>
           </a:xfrm>
           <a:prstGeom prst="rect">
@@ -4272,7 +4658,7 @@
         </p:nvSpPr>
         <p:spPr>
           <a:xfrm>
-            <a:off x="5029200" y="4643437"/>
+            <a:off x="5029200" y="4464843"/>
             <a:ext cx="3749039" cy="274320"/>
           </a:xfrm>
           <a:prstGeom prst="rect">
@@ -4311,115 +4697,23 @@
       </p:sp>
       <p:sp>
         <p:nvSpPr>
-          <p:cNvPr id="4" name="TextBox 3"/>
-          <p:cNvSpPr txBox="1"/>
-          <p:nvPr/>
-        </p:nvSpPr>
-        <p:spPr>
-          <a:xfrm>
-            <a:off x="357187" y="357187"/>
-            <a:ext cx="8429625" cy="401835"/>
-          </a:xfrm>
-          <a:prstGeom prst="rect">
-            <a:avLst/>
-          </a:prstGeom>
-          <a:noFill/>
-        </p:spPr>
-        <p:txBody>
-          <a:bodyPr wrap="square" tIns="0" bIns="0" lIns="0" rIns="0">
-            <a:spAutoFit/>
-          </a:bodyPr>
-          <a:lstStyle/>
-          <a:p>
-            <a:pPr algn="l">
-              <a:lnSpc>
-                <a:spcPct val="120000"/>
-              </a:lnSpc>
-              <a:defRPr sz="2600" b="1" i="0">
-                <a:solidFill>
-                  <a:srgbClr val="2C3440"/>
-                </a:solidFill>
-                <a:latin typeface="Arimo"/>
-              </a:defRPr>
-            </a:pPr>
-            <a:r>
-              <a:rPr sz="2600" b="1" i="0">
-                <a:solidFill>
-                  <a:srgbClr val="2C3440"/>
-                </a:solidFill>
-                <a:latin typeface="Arimo"/>
-              </a:rPr>
-              <a:t>Путь Метаболической Конверсии</a:t>
-            </a:r>
-          </a:p>
-        </p:txBody>
-      </p:sp>
-      <p:sp>
-        <p:nvSpPr>
-          <p:cNvPr id="5" name="TextBox 4"/>
-          <p:cNvSpPr txBox="1"/>
-          <p:nvPr/>
-        </p:nvSpPr>
-        <p:spPr>
-          <a:xfrm>
-            <a:off x="357187" y="803671"/>
-            <a:ext cx="8429625" cy="267890"/>
-          </a:xfrm>
-          <a:prstGeom prst="rect">
-            <a:avLst/>
-          </a:prstGeom>
-          <a:noFill/>
-        </p:spPr>
-        <p:txBody>
-          <a:bodyPr wrap="square" tIns="0" bIns="0" lIns="0" rIns="0">
-            <a:spAutoFit/>
-          </a:bodyPr>
-          <a:lstStyle/>
-          <a:p>
-            <a:pPr algn="l">
-              <a:lnSpc>
-                <a:spcPct val="120000"/>
-              </a:lnSpc>
-              <a:defRPr sz="1500" b="0" i="0">
-                <a:solidFill>
-                  <a:srgbClr val="6D8470"/>
-                </a:solidFill>
-                <a:latin typeface="Arimo"/>
-              </a:defRPr>
-            </a:pPr>
-            <a:r>
-              <a:rPr sz="1500" b="0" i="0">
-                <a:solidFill>
-                  <a:srgbClr val="6D8470"/>
-                </a:solidFill>
-                <a:latin typeface="Arimo"/>
-              </a:rPr>
-              <a:t>Каскад окисления ретиноидов в кератиноцитах</a:t>
-            </a:r>
-          </a:p>
-        </p:txBody>
-      </p:sp>
-      <p:sp>
-        <p:nvSpPr>
-          <p:cNvPr id="6" name="Rounded Rectangle 5"/>
+          <p:cNvPr id="4" name="Rectangle 3"/>
           <p:cNvSpPr/>
           <p:nvPr/>
         </p:nvSpPr>
         <p:spPr>
           <a:xfrm>
-            <a:off x="357187" y="1339453"/>
-            <a:ext cx="1874519" cy="2834640"/>
-          </a:xfrm>
-          <a:prstGeom prst="roundRect">
+            <a:off x="357187" y="4732734"/>
+            <a:ext cx="8429625" cy="8929"/>
+          </a:xfrm>
+          <a:prstGeom prst="rect">
             <a:avLst/>
           </a:prstGeom>
           <a:solidFill>
-            <a:srgbClr val="E6D2CA"/>
+            <a:srgbClr val="D7E0CE"/>
           </a:solidFill>
-          <a:ln w="12700">
-            <a:solidFill>
-              <a:srgbClr val="D7E0CE"/>
-            </a:solidFill>
+          <a:ln>
+            <a:noFill/>
           </a:ln>
         </p:spPr>
         <p:style>
@@ -4444,25 +4738,231 @@
           </a:p>
         </p:txBody>
       </p:sp>
-      <p:sp>
-        <p:nvSpPr>
-          <p:cNvPr id="7" name="Rounded Rectangle 6"/>
+      <p:pic>
+        <p:nvPicPr>
+          <p:cNvPr id="5" name="Picture 4" descr="mark_6D8470.png"/>
+          <p:cNvPicPr>
+            <a:picLocks noChangeAspect="1"/>
+          </p:cNvPicPr>
+          <p:nvPr/>
+        </p:nvPicPr>
+        <p:blipFill>
+          <a:blip r:embed="rId2"/>
+          <a:stretch>
+            <a:fillRect/>
+          </a:stretch>
+        </p:blipFill>
+        <p:spPr>
+          <a:xfrm>
+            <a:off x="357187" y="4848820"/>
+            <a:ext cx="178593" cy="178593"/>
+          </a:xfrm>
+          <a:prstGeom prst="rect">
+            <a:avLst/>
+          </a:prstGeom>
+        </p:spPr>
+      </p:pic>
+      <p:sp>
+        <p:nvSpPr>
+          <p:cNvPr id="6" name="TextBox 5"/>
+          <p:cNvSpPr txBox="1"/>
+          <p:nvPr/>
+        </p:nvSpPr>
+        <p:spPr>
+          <a:xfrm>
+            <a:off x="607218" y="4830960"/>
+            <a:ext cx="1785937" cy="178593"/>
+          </a:xfrm>
+          <a:prstGeom prst="rect">
+            <a:avLst/>
+          </a:prstGeom>
+          <a:noFill/>
+        </p:spPr>
+        <p:txBody>
+          <a:bodyPr wrap="square" tIns="0" bIns="0" lIns="0" rIns="0">
+            <a:spAutoFit/>
+          </a:bodyPr>
+          <a:lstStyle/>
+          <a:p>
+            <a:pPr algn="l">
+              <a:lnSpc>
+                <a:spcPct val="120000"/>
+              </a:lnSpc>
+              <a:defRPr sz="1100" b="1" i="0">
+                <a:solidFill>
+                  <a:srgbClr val="3D4A40"/>
+                </a:solidFill>
+                <a:latin typeface="Arimo"/>
+              </a:defRPr>
+            </a:pPr>
+            <a:r>
+              <a:rPr sz="1100" b="1" i="0">
+                <a:solidFill>
+                  <a:srgbClr val="3D4A40"/>
+                </a:solidFill>
+                <a:latin typeface="Arimo"/>
+              </a:rPr>
+              <a:t>YM PROSKIN</a:t>
+            </a:r>
+          </a:p>
+        </p:txBody>
+      </p:sp>
+      <p:sp>
+        <p:nvSpPr>
+          <p:cNvPr id="7" name="TextBox 6"/>
+          <p:cNvSpPr txBox="1"/>
+          <p:nvPr/>
+        </p:nvSpPr>
+        <p:spPr>
+          <a:xfrm>
+            <a:off x="8251031" y="4830960"/>
+            <a:ext cx="535781" cy="178593"/>
+          </a:xfrm>
+          <a:prstGeom prst="rect">
+            <a:avLst/>
+          </a:prstGeom>
+          <a:noFill/>
+        </p:spPr>
+        <p:txBody>
+          <a:bodyPr wrap="square" tIns="0" bIns="0" lIns="0" rIns="0">
+            <a:spAutoFit/>
+          </a:bodyPr>
+          <a:lstStyle/>
+          <a:p>
+            <a:pPr algn="r">
+              <a:lnSpc>
+                <a:spcPct val="120000"/>
+              </a:lnSpc>
+              <a:defRPr sz="1100" b="0" i="0">
+                <a:solidFill>
+                  <a:srgbClr val="6D8470"/>
+                </a:solidFill>
+                <a:latin typeface="Arimo"/>
+              </a:defRPr>
+            </a:pPr>
+            <a:r>
+              <a:rPr sz="1100" b="0" i="0">
+                <a:solidFill>
+                  <a:srgbClr val="6D8470"/>
+                </a:solidFill>
+                <a:latin typeface="Arimo"/>
+              </a:rPr>
+              <a:t>4</a:t>
+            </a:r>
+          </a:p>
+        </p:txBody>
+      </p:sp>
+      <p:sp>
+        <p:nvSpPr>
+          <p:cNvPr id="8" name="TextBox 7"/>
+          <p:cNvSpPr txBox="1"/>
+          <p:nvPr/>
+        </p:nvSpPr>
+        <p:spPr>
+          <a:xfrm>
+            <a:off x="357187" y="357187"/>
+            <a:ext cx="8429625" cy="401835"/>
+          </a:xfrm>
+          <a:prstGeom prst="rect">
+            <a:avLst/>
+          </a:prstGeom>
+          <a:noFill/>
+        </p:spPr>
+        <p:txBody>
+          <a:bodyPr wrap="square" tIns="0" bIns="0" lIns="0" rIns="0">
+            <a:spAutoFit/>
+          </a:bodyPr>
+          <a:lstStyle/>
+          <a:p>
+            <a:pPr algn="l">
+              <a:lnSpc>
+                <a:spcPct val="120000"/>
+              </a:lnSpc>
+              <a:defRPr sz="2600" b="1" i="0">
+                <a:solidFill>
+                  <a:srgbClr val="2C3440"/>
+                </a:solidFill>
+                <a:latin typeface="Arimo"/>
+              </a:defRPr>
+            </a:pPr>
+            <a:r>
+              <a:rPr sz="2600" b="1" i="0">
+                <a:solidFill>
+                  <a:srgbClr val="2C3440"/>
+                </a:solidFill>
+                <a:latin typeface="Arimo"/>
+              </a:rPr>
+              <a:t>Путь Метаболической Конверсии</a:t>
+            </a:r>
+          </a:p>
+        </p:txBody>
+      </p:sp>
+      <p:sp>
+        <p:nvSpPr>
+          <p:cNvPr id="9" name="TextBox 8"/>
+          <p:cNvSpPr txBox="1"/>
+          <p:nvPr/>
+        </p:nvSpPr>
+        <p:spPr>
+          <a:xfrm>
+            <a:off x="357187" y="803671"/>
+            <a:ext cx="8429625" cy="267890"/>
+          </a:xfrm>
+          <a:prstGeom prst="rect">
+            <a:avLst/>
+          </a:prstGeom>
+          <a:noFill/>
+        </p:spPr>
+        <p:txBody>
+          <a:bodyPr wrap="square" tIns="0" bIns="0" lIns="0" rIns="0">
+            <a:spAutoFit/>
+          </a:bodyPr>
+          <a:lstStyle/>
+          <a:p>
+            <a:pPr algn="l">
+              <a:lnSpc>
+                <a:spcPct val="120000"/>
+              </a:lnSpc>
+              <a:defRPr sz="1500" b="0" i="0">
+                <a:solidFill>
+                  <a:srgbClr val="6D8470"/>
+                </a:solidFill>
+                <a:latin typeface="Arimo"/>
+              </a:defRPr>
+            </a:pPr>
+            <a:r>
+              <a:rPr sz="1500" b="0" i="0">
+                <a:solidFill>
+                  <a:srgbClr val="6D8470"/>
+                </a:solidFill>
+                <a:latin typeface="Arimo"/>
+              </a:rPr>
+              <a:t>Каскад окисления ретиноидов в кератиноцитах</a:t>
+            </a:r>
+          </a:p>
+        </p:txBody>
+      </p:sp>
+      <p:sp>
+        <p:nvSpPr>
+          <p:cNvPr id="10" name="Rounded Rectangle 9"/>
           <p:cNvSpPr/>
           <p:nvPr/>
         </p:nvSpPr>
         <p:spPr>
           <a:xfrm>
-            <a:off x="494347" y="1518046"/>
-            <a:ext cx="548640" cy="274320"/>
+            <a:off x="357187" y="1339453"/>
+            <a:ext cx="1874519" cy="2834640"/>
           </a:xfrm>
           <a:prstGeom prst="roundRect">
             <a:avLst/>
           </a:prstGeom>
           <a:solidFill>
-            <a:srgbClr val="6D8470"/>
+            <a:srgbClr val="E6D2CA"/>
           </a:solidFill>
-          <a:ln>
-            <a:noFill/>
+          <a:ln w="12700">
+            <a:solidFill>
+              <a:srgbClr val="D7E0CE"/>
+            </a:solidFill>
           </a:ln>
         </p:spPr>
         <p:style>
@@ -4483,137 +4983,29 @@
           <a:bodyPr rtlCol="0" anchor="ctr"/>
           <a:lstStyle/>
           <a:p>
-            <a:pPr algn="ctr">
-              <a:defRPr sz="1000" b="1">
-                <a:solidFill>
-                  <a:srgbClr val="F8F6F4"/>
-                </a:solidFill>
-                <a:latin typeface="Arimo"/>
-              </a:defRPr>
-            </a:pPr>
-            <a:r>
-              <a:rPr sz="1000" b="1">
-                <a:solidFill>
-                  <a:srgbClr val="F8F6F4"/>
-                </a:solidFill>
-                <a:latin typeface="Arimo"/>
-              </a:rPr>
-              <a:t>1</a:t>
-            </a:r>
-          </a:p>
-        </p:txBody>
-      </p:sp>
-      <p:sp>
-        <p:nvSpPr>
-          <p:cNvPr id="8" name="TextBox 7"/>
-          <p:cNvSpPr txBox="1"/>
-          <p:nvPr/>
-        </p:nvSpPr>
-        <p:spPr>
-          <a:xfrm>
-            <a:off x="494347" y="1919882"/>
-            <a:ext cx="1600199" cy="365760"/>
-          </a:xfrm>
-          <a:prstGeom prst="rect">
-            <a:avLst/>
-          </a:prstGeom>
-          <a:noFill/>
-        </p:spPr>
-        <p:txBody>
-          <a:bodyPr wrap="square" tIns="0" bIns="0" lIns="0" rIns="0">
-            <a:spAutoFit/>
-          </a:bodyPr>
-          <a:lstStyle/>
-          <a:p>
-            <a:pPr algn="l">
-              <a:lnSpc>
-                <a:spcPct val="120000"/>
-              </a:lnSpc>
-              <a:defRPr sz="1400" b="1" i="0">
-                <a:solidFill>
-                  <a:srgbClr val="2C3440"/>
-                </a:solidFill>
-                <a:latin typeface="Arimo"/>
-              </a:defRPr>
-            </a:pPr>
-            <a:r>
-              <a:rPr sz="1400" b="1" i="0">
-                <a:solidFill>
-                  <a:srgbClr val="2C3440"/>
-                </a:solidFill>
-                <a:latin typeface="Arimo"/>
-              </a:rPr>
-              <a:t>Ретилпальмитат</a:t>
-            </a:r>
-          </a:p>
-        </p:txBody>
-      </p:sp>
-      <p:sp>
-        <p:nvSpPr>
-          <p:cNvPr id="9" name="TextBox 8"/>
-          <p:cNvSpPr txBox="1"/>
-          <p:nvPr/>
-        </p:nvSpPr>
-        <p:spPr>
-          <a:xfrm>
-            <a:off x="494347" y="2366367"/>
-            <a:ext cx="1600199" cy="1645920"/>
-          </a:xfrm>
-          <a:prstGeom prst="rect">
-            <a:avLst/>
-          </a:prstGeom>
-          <a:noFill/>
-        </p:spPr>
-        <p:txBody>
-          <a:bodyPr wrap="square" tIns="0" bIns="0" lIns="0" rIns="0">
-            <a:spAutoFit/>
-          </a:bodyPr>
-          <a:lstStyle/>
-          <a:p>
-            <a:pPr algn="l">
-              <a:lnSpc>
-                <a:spcPct val="120000"/>
-              </a:lnSpc>
-              <a:defRPr sz="1100" b="0" i="0">
-                <a:solidFill>
-                  <a:srgbClr val="3D4A40"/>
-                </a:solidFill>
-                <a:latin typeface="Arimo"/>
-              </a:defRPr>
-            </a:pPr>
-            <a:r>
-              <a:rPr sz="1100" b="0" i="0">
-                <a:solidFill>
-                  <a:srgbClr val="3D4A40"/>
-                </a:solidFill>
-                <a:latin typeface="Arimo"/>
-              </a:rPr>
-              <a:t>Слабый эфир, требует 3 шага конверсии до ретиноевой кислоты.</a:t>
-            </a:r>
-          </a:p>
-        </p:txBody>
-      </p:sp>
-      <p:sp>
-        <p:nvSpPr>
-          <p:cNvPr id="10" name="Rounded Rectangle 9"/>
+            <a:pPr algn="ctr"/>
+          </a:p>
+        </p:txBody>
+      </p:sp>
+      <p:sp>
+        <p:nvSpPr>
+          <p:cNvPr id="11" name="Rounded Rectangle 10"/>
           <p:cNvSpPr/>
           <p:nvPr/>
         </p:nvSpPr>
         <p:spPr>
           <a:xfrm>
-            <a:off x="2500312" y="1339453"/>
-            <a:ext cx="1874519" cy="2834640"/>
+            <a:off x="494347" y="1518046"/>
+            <a:ext cx="548640" cy="274320"/>
           </a:xfrm>
           <a:prstGeom prst="roundRect">
             <a:avLst/>
           </a:prstGeom>
           <a:solidFill>
-            <a:srgbClr val="E6D2CA"/>
+            <a:srgbClr val="6D8470"/>
           </a:solidFill>
-          <a:ln w="12700">
-            <a:solidFill>
-              <a:srgbClr val="D7E0CE"/>
-            </a:solidFill>
+          <a:ln>
+            <a:noFill/>
           </a:ln>
         </p:spPr>
         <p:style>
@@ -4634,29 +5026,137 @@
           <a:bodyPr rtlCol="0" anchor="ctr"/>
           <a:lstStyle/>
           <a:p>
-            <a:pPr algn="ctr"/>
-          </a:p>
-        </p:txBody>
-      </p:sp>
-      <p:sp>
-        <p:nvSpPr>
-          <p:cNvPr id="11" name="Rounded Rectangle 10"/>
+            <a:pPr algn="ctr">
+              <a:defRPr sz="1000" b="1">
+                <a:solidFill>
+                  <a:srgbClr val="F8F6F4"/>
+                </a:solidFill>
+                <a:latin typeface="Arimo"/>
+              </a:defRPr>
+            </a:pPr>
+            <a:r>
+              <a:rPr sz="1000" b="1">
+                <a:solidFill>
+                  <a:srgbClr val="F8F6F4"/>
+                </a:solidFill>
+                <a:latin typeface="Arimo"/>
+              </a:rPr>
+              <a:t>1</a:t>
+            </a:r>
+          </a:p>
+        </p:txBody>
+      </p:sp>
+      <p:sp>
+        <p:nvSpPr>
+          <p:cNvPr id="12" name="TextBox 11"/>
+          <p:cNvSpPr txBox="1"/>
+          <p:nvPr/>
+        </p:nvSpPr>
+        <p:spPr>
+          <a:xfrm>
+            <a:off x="494347" y="1919882"/>
+            <a:ext cx="1600199" cy="365760"/>
+          </a:xfrm>
+          <a:prstGeom prst="rect">
+            <a:avLst/>
+          </a:prstGeom>
+          <a:noFill/>
+        </p:spPr>
+        <p:txBody>
+          <a:bodyPr wrap="square" tIns="0" bIns="0" lIns="0" rIns="0">
+            <a:spAutoFit/>
+          </a:bodyPr>
+          <a:lstStyle/>
+          <a:p>
+            <a:pPr algn="l">
+              <a:lnSpc>
+                <a:spcPct val="120000"/>
+              </a:lnSpc>
+              <a:defRPr sz="1400" b="1" i="0">
+                <a:solidFill>
+                  <a:srgbClr val="2C3440"/>
+                </a:solidFill>
+                <a:latin typeface="Arimo"/>
+              </a:defRPr>
+            </a:pPr>
+            <a:r>
+              <a:rPr sz="1400" b="1" i="0">
+                <a:solidFill>
+                  <a:srgbClr val="2C3440"/>
+                </a:solidFill>
+                <a:latin typeface="Arimo"/>
+              </a:rPr>
+              <a:t>Ретилпальмитат</a:t>
+            </a:r>
+          </a:p>
+        </p:txBody>
+      </p:sp>
+      <p:sp>
+        <p:nvSpPr>
+          <p:cNvPr id="13" name="TextBox 12"/>
+          <p:cNvSpPr txBox="1"/>
+          <p:nvPr/>
+        </p:nvSpPr>
+        <p:spPr>
+          <a:xfrm>
+            <a:off x="494347" y="2366367"/>
+            <a:ext cx="1600199" cy="1645920"/>
+          </a:xfrm>
+          <a:prstGeom prst="rect">
+            <a:avLst/>
+          </a:prstGeom>
+          <a:noFill/>
+        </p:spPr>
+        <p:txBody>
+          <a:bodyPr wrap="square" tIns="0" bIns="0" lIns="0" rIns="0">
+            <a:spAutoFit/>
+          </a:bodyPr>
+          <a:lstStyle/>
+          <a:p>
+            <a:pPr algn="l">
+              <a:lnSpc>
+                <a:spcPct val="120000"/>
+              </a:lnSpc>
+              <a:defRPr sz="1100" b="0" i="0">
+                <a:solidFill>
+                  <a:srgbClr val="3D4A40"/>
+                </a:solidFill>
+                <a:latin typeface="Arimo"/>
+              </a:defRPr>
+            </a:pPr>
+            <a:r>
+              <a:rPr sz="1100" b="0" i="0">
+                <a:solidFill>
+                  <a:srgbClr val="3D4A40"/>
+                </a:solidFill>
+                <a:latin typeface="Arimo"/>
+              </a:rPr>
+              <a:t>Слабый эфир, требует 3 шага конверсии до ретиноевой кислоты.</a:t>
+            </a:r>
+          </a:p>
+        </p:txBody>
+      </p:sp>
+      <p:sp>
+        <p:nvSpPr>
+          <p:cNvPr id="14" name="Rounded Rectangle 13"/>
           <p:cNvSpPr/>
           <p:nvPr/>
         </p:nvSpPr>
         <p:spPr>
           <a:xfrm>
-            <a:off x="2637472" y="1518046"/>
-            <a:ext cx="548640" cy="274320"/>
+            <a:off x="2500312" y="1339453"/>
+            <a:ext cx="1874519" cy="2834640"/>
           </a:xfrm>
           <a:prstGeom prst="roundRect">
             <a:avLst/>
           </a:prstGeom>
           <a:solidFill>
-            <a:srgbClr val="6D8470"/>
+            <a:srgbClr val="E6D2CA"/>
           </a:solidFill>
-          <a:ln>
-            <a:noFill/>
+          <a:ln w="12700">
+            <a:solidFill>
+              <a:srgbClr val="D7E0CE"/>
+            </a:solidFill>
           </a:ln>
         </p:spPr>
         <p:style>
@@ -4677,137 +5177,29 @@
           <a:bodyPr rtlCol="0" anchor="ctr"/>
           <a:lstStyle/>
           <a:p>
-            <a:pPr algn="ctr">
-              <a:defRPr sz="1000" b="1">
-                <a:solidFill>
-                  <a:srgbClr val="F8F6F4"/>
-                </a:solidFill>
-                <a:latin typeface="Arimo"/>
-              </a:defRPr>
-            </a:pPr>
-            <a:r>
-              <a:rPr sz="1000" b="1">
-                <a:solidFill>
-                  <a:srgbClr val="F8F6F4"/>
-                </a:solidFill>
-                <a:latin typeface="Arimo"/>
-              </a:rPr>
-              <a:t>2</a:t>
-            </a:r>
-          </a:p>
-        </p:txBody>
-      </p:sp>
-      <p:sp>
-        <p:nvSpPr>
-          <p:cNvPr id="12" name="TextBox 11"/>
-          <p:cNvSpPr txBox="1"/>
-          <p:nvPr/>
-        </p:nvSpPr>
-        <p:spPr>
-          <a:xfrm>
-            <a:off x="2637472" y="1919882"/>
-            <a:ext cx="1600199" cy="365760"/>
-          </a:xfrm>
-          <a:prstGeom prst="rect">
-            <a:avLst/>
-          </a:prstGeom>
-          <a:noFill/>
-        </p:spPr>
-        <p:txBody>
-          <a:bodyPr wrap="square" tIns="0" bIns="0" lIns="0" rIns="0">
-            <a:spAutoFit/>
-          </a:bodyPr>
-          <a:lstStyle/>
-          <a:p>
-            <a:pPr algn="l">
-              <a:lnSpc>
-                <a:spcPct val="120000"/>
-              </a:lnSpc>
-              <a:defRPr sz="1400" b="1" i="0">
-                <a:solidFill>
-                  <a:srgbClr val="2C3440"/>
-                </a:solidFill>
-                <a:latin typeface="Arimo"/>
-              </a:defRPr>
-            </a:pPr>
-            <a:r>
-              <a:rPr sz="1400" b="1" i="0">
-                <a:solidFill>
-                  <a:srgbClr val="2C3440"/>
-                </a:solidFill>
-                <a:latin typeface="Arimo"/>
-              </a:rPr>
-              <a:t>Ретинол</a:t>
-            </a:r>
-          </a:p>
-        </p:txBody>
-      </p:sp>
-      <p:sp>
-        <p:nvSpPr>
-          <p:cNvPr id="13" name="TextBox 12"/>
-          <p:cNvSpPr txBox="1"/>
-          <p:nvPr/>
-        </p:nvSpPr>
-        <p:spPr>
-          <a:xfrm>
-            <a:off x="2637472" y="2366367"/>
-            <a:ext cx="1600199" cy="1645920"/>
-          </a:xfrm>
-          <a:prstGeom prst="rect">
-            <a:avLst/>
-          </a:prstGeom>
-          <a:noFill/>
-        </p:spPr>
-        <p:txBody>
-          <a:bodyPr wrap="square" tIns="0" bIns="0" lIns="0" rIns="0">
-            <a:spAutoFit/>
-          </a:bodyPr>
-          <a:lstStyle/>
-          <a:p>
-            <a:pPr algn="l">
-              <a:lnSpc>
-                <a:spcPct val="120000"/>
-              </a:lnSpc>
-              <a:defRPr sz="1100" b="0" i="0">
-                <a:solidFill>
-                  <a:srgbClr val="3D4A40"/>
-                </a:solidFill>
-                <a:latin typeface="Arimo"/>
-              </a:defRPr>
-            </a:pPr>
-            <a:r>
-              <a:rPr sz="1100" b="0" i="0">
-                <a:solidFill>
-                  <a:srgbClr val="3D4A40"/>
-                </a:solidFill>
-                <a:latin typeface="Arimo"/>
-              </a:rPr>
-              <a:t>Стимулирует коллаген, требует 2 шага метаболического превращения.</a:t>
-            </a:r>
-          </a:p>
-        </p:txBody>
-      </p:sp>
-      <p:sp>
-        <p:nvSpPr>
-          <p:cNvPr id="14" name="Rounded Rectangle 13"/>
+            <a:pPr algn="ctr"/>
+          </a:p>
+        </p:txBody>
+      </p:sp>
+      <p:sp>
+        <p:nvSpPr>
+          <p:cNvPr id="15" name="Rounded Rectangle 14"/>
           <p:cNvSpPr/>
           <p:nvPr/>
         </p:nvSpPr>
         <p:spPr>
           <a:xfrm>
-            <a:off x="4643437" y="1339453"/>
-            <a:ext cx="1874519" cy="2834640"/>
+            <a:off x="2637472" y="1518046"/>
+            <a:ext cx="548640" cy="274320"/>
           </a:xfrm>
           <a:prstGeom prst="roundRect">
             <a:avLst/>
           </a:prstGeom>
           <a:solidFill>
-            <a:srgbClr val="E6D2CA"/>
+            <a:srgbClr val="6D8470"/>
           </a:solidFill>
-          <a:ln w="12700">
-            <a:solidFill>
-              <a:srgbClr val="D7E0CE"/>
-            </a:solidFill>
+          <a:ln>
+            <a:noFill/>
           </a:ln>
         </p:spPr>
         <p:style>
@@ -4828,29 +5220,137 @@
           <a:bodyPr rtlCol="0" anchor="ctr"/>
           <a:lstStyle/>
           <a:p>
-            <a:pPr algn="ctr"/>
-          </a:p>
-        </p:txBody>
-      </p:sp>
-      <p:sp>
-        <p:nvSpPr>
-          <p:cNvPr id="15" name="Rounded Rectangle 14"/>
+            <a:pPr algn="ctr">
+              <a:defRPr sz="1000" b="1">
+                <a:solidFill>
+                  <a:srgbClr val="F8F6F4"/>
+                </a:solidFill>
+                <a:latin typeface="Arimo"/>
+              </a:defRPr>
+            </a:pPr>
+            <a:r>
+              <a:rPr sz="1000" b="1">
+                <a:solidFill>
+                  <a:srgbClr val="F8F6F4"/>
+                </a:solidFill>
+                <a:latin typeface="Arimo"/>
+              </a:rPr>
+              <a:t>2</a:t>
+            </a:r>
+          </a:p>
+        </p:txBody>
+      </p:sp>
+      <p:sp>
+        <p:nvSpPr>
+          <p:cNvPr id="16" name="TextBox 15"/>
+          <p:cNvSpPr txBox="1"/>
+          <p:nvPr/>
+        </p:nvSpPr>
+        <p:spPr>
+          <a:xfrm>
+            <a:off x="2637472" y="1919882"/>
+            <a:ext cx="1600199" cy="365760"/>
+          </a:xfrm>
+          <a:prstGeom prst="rect">
+            <a:avLst/>
+          </a:prstGeom>
+          <a:noFill/>
+        </p:spPr>
+        <p:txBody>
+          <a:bodyPr wrap="square" tIns="0" bIns="0" lIns="0" rIns="0">
+            <a:spAutoFit/>
+          </a:bodyPr>
+          <a:lstStyle/>
+          <a:p>
+            <a:pPr algn="l">
+              <a:lnSpc>
+                <a:spcPct val="120000"/>
+              </a:lnSpc>
+              <a:defRPr sz="1400" b="1" i="0">
+                <a:solidFill>
+                  <a:srgbClr val="2C3440"/>
+                </a:solidFill>
+                <a:latin typeface="Arimo"/>
+              </a:defRPr>
+            </a:pPr>
+            <a:r>
+              <a:rPr sz="1400" b="1" i="0">
+                <a:solidFill>
+                  <a:srgbClr val="2C3440"/>
+                </a:solidFill>
+                <a:latin typeface="Arimo"/>
+              </a:rPr>
+              <a:t>Ретинол</a:t>
+            </a:r>
+          </a:p>
+        </p:txBody>
+      </p:sp>
+      <p:sp>
+        <p:nvSpPr>
+          <p:cNvPr id="17" name="TextBox 16"/>
+          <p:cNvSpPr txBox="1"/>
+          <p:nvPr/>
+        </p:nvSpPr>
+        <p:spPr>
+          <a:xfrm>
+            <a:off x="2637472" y="2366367"/>
+            <a:ext cx="1600199" cy="1645920"/>
+          </a:xfrm>
+          <a:prstGeom prst="rect">
+            <a:avLst/>
+          </a:prstGeom>
+          <a:noFill/>
+        </p:spPr>
+        <p:txBody>
+          <a:bodyPr wrap="square" tIns="0" bIns="0" lIns="0" rIns="0">
+            <a:spAutoFit/>
+          </a:bodyPr>
+          <a:lstStyle/>
+          <a:p>
+            <a:pPr algn="l">
+              <a:lnSpc>
+                <a:spcPct val="120000"/>
+              </a:lnSpc>
+              <a:defRPr sz="1100" b="0" i="0">
+                <a:solidFill>
+                  <a:srgbClr val="3D4A40"/>
+                </a:solidFill>
+                <a:latin typeface="Arimo"/>
+              </a:defRPr>
+            </a:pPr>
+            <a:r>
+              <a:rPr sz="1100" b="0" i="0">
+                <a:solidFill>
+                  <a:srgbClr val="3D4A40"/>
+                </a:solidFill>
+                <a:latin typeface="Arimo"/>
+              </a:rPr>
+              <a:t>Стимулирует коллаген, требует 2 шага метаболического превращения.</a:t>
+            </a:r>
+          </a:p>
+        </p:txBody>
+      </p:sp>
+      <p:sp>
+        <p:nvSpPr>
+          <p:cNvPr id="18" name="Rounded Rectangle 17"/>
           <p:cNvSpPr/>
           <p:nvPr/>
         </p:nvSpPr>
         <p:spPr>
           <a:xfrm>
-            <a:off x="4780597" y="1518046"/>
-            <a:ext cx="548640" cy="274320"/>
+            <a:off x="4643437" y="1339453"/>
+            <a:ext cx="1874519" cy="2834640"/>
           </a:xfrm>
           <a:prstGeom prst="roundRect">
             <a:avLst/>
           </a:prstGeom>
           <a:solidFill>
-            <a:srgbClr val="6D8470"/>
+            <a:srgbClr val="E6D2CA"/>
           </a:solidFill>
-          <a:ln>
-            <a:noFill/>
+          <a:ln w="12700">
+            <a:solidFill>
+              <a:srgbClr val="D7E0CE"/>
+            </a:solidFill>
           </a:ln>
         </p:spPr>
         <p:style>
@@ -4871,137 +5371,29 @@
           <a:bodyPr rtlCol="0" anchor="ctr"/>
           <a:lstStyle/>
           <a:p>
-            <a:pPr algn="ctr">
-              <a:defRPr sz="1000" b="1">
-                <a:solidFill>
-                  <a:srgbClr val="F8F6F4"/>
-                </a:solidFill>
-                <a:latin typeface="Arimo"/>
-              </a:defRPr>
-            </a:pPr>
-            <a:r>
-              <a:rPr sz="1000" b="1">
-                <a:solidFill>
-                  <a:srgbClr val="F8F6F4"/>
-                </a:solidFill>
-                <a:latin typeface="Arimo"/>
-              </a:rPr>
-              <a:t>3</a:t>
-            </a:r>
-          </a:p>
-        </p:txBody>
-      </p:sp>
-      <p:sp>
-        <p:nvSpPr>
-          <p:cNvPr id="16" name="TextBox 15"/>
-          <p:cNvSpPr txBox="1"/>
-          <p:nvPr/>
-        </p:nvSpPr>
-        <p:spPr>
-          <a:xfrm>
-            <a:off x="4780597" y="1919882"/>
-            <a:ext cx="1600199" cy="365760"/>
-          </a:xfrm>
-          <a:prstGeom prst="rect">
-            <a:avLst/>
-          </a:prstGeom>
-          <a:noFill/>
-        </p:spPr>
-        <p:txBody>
-          <a:bodyPr wrap="square" tIns="0" bIns="0" lIns="0" rIns="0">
-            <a:spAutoFit/>
-          </a:bodyPr>
-          <a:lstStyle/>
-          <a:p>
-            <a:pPr algn="l">
-              <a:lnSpc>
-                <a:spcPct val="120000"/>
-              </a:lnSpc>
-              <a:defRPr sz="1400" b="1" i="0">
-                <a:solidFill>
-                  <a:srgbClr val="2C3440"/>
-                </a:solidFill>
-                <a:latin typeface="Arimo"/>
-              </a:defRPr>
-            </a:pPr>
-            <a:r>
-              <a:rPr sz="1400" b="1" i="0">
-                <a:solidFill>
-                  <a:srgbClr val="2C3440"/>
-                </a:solidFill>
-                <a:latin typeface="Arimo"/>
-              </a:rPr>
-              <a:t>Ретинальдегид</a:t>
-            </a:r>
-          </a:p>
-        </p:txBody>
-      </p:sp>
-      <p:sp>
-        <p:nvSpPr>
-          <p:cNvPr id="17" name="TextBox 16"/>
-          <p:cNvSpPr txBox="1"/>
-          <p:nvPr/>
-        </p:nvSpPr>
-        <p:spPr>
-          <a:xfrm>
-            <a:off x="4780597" y="2366367"/>
-            <a:ext cx="1600199" cy="1645920"/>
-          </a:xfrm>
-          <a:prstGeom prst="rect">
-            <a:avLst/>
-          </a:prstGeom>
-          <a:noFill/>
-        </p:spPr>
-        <p:txBody>
-          <a:bodyPr wrap="square" tIns="0" bIns="0" lIns="0" rIns="0">
-            <a:spAutoFit/>
-          </a:bodyPr>
-          <a:lstStyle/>
-          <a:p>
-            <a:pPr algn="l">
-              <a:lnSpc>
-                <a:spcPct val="120000"/>
-              </a:lnSpc>
-              <a:defRPr sz="1100" b="0" i="0">
-                <a:solidFill>
-                  <a:srgbClr val="3D4A40"/>
-                </a:solidFill>
-                <a:latin typeface="Arimo"/>
-              </a:defRPr>
-            </a:pPr>
-            <a:r>
-              <a:rPr sz="1100" b="0" i="0">
-                <a:solidFill>
-                  <a:srgbClr val="3D4A40"/>
-                </a:solidFill>
-                <a:latin typeface="Arimo"/>
-              </a:rPr>
-              <a:t>Высокоактивный ретиналь, требует всего 1 шаг конверсии.</a:t>
-            </a:r>
-          </a:p>
-        </p:txBody>
-      </p:sp>
-      <p:sp>
-        <p:nvSpPr>
-          <p:cNvPr id="18" name="Rounded Rectangle 17"/>
+            <a:pPr algn="ctr"/>
+          </a:p>
+        </p:txBody>
+      </p:sp>
+      <p:sp>
+        <p:nvSpPr>
+          <p:cNvPr id="19" name="Rounded Rectangle 18"/>
           <p:cNvSpPr/>
           <p:nvPr/>
         </p:nvSpPr>
         <p:spPr>
           <a:xfrm>
-            <a:off x="6786562" y="1339453"/>
-            <a:ext cx="1874519" cy="2834640"/>
+            <a:off x="4780597" y="1518046"/>
+            <a:ext cx="548640" cy="274320"/>
           </a:xfrm>
           <a:prstGeom prst="roundRect">
             <a:avLst/>
           </a:prstGeom>
           <a:solidFill>
-            <a:srgbClr val="E6D2CA"/>
+            <a:srgbClr val="6D8470"/>
           </a:solidFill>
-          <a:ln w="12700">
-            <a:solidFill>
-              <a:srgbClr val="D7E0CE"/>
-            </a:solidFill>
+          <a:ln>
+            <a:noFill/>
           </a:ln>
         </p:spPr>
         <p:style>
@@ -5022,29 +5414,137 @@
           <a:bodyPr rtlCol="0" anchor="ctr"/>
           <a:lstStyle/>
           <a:p>
-            <a:pPr algn="ctr"/>
-          </a:p>
-        </p:txBody>
-      </p:sp>
-      <p:sp>
-        <p:nvSpPr>
-          <p:cNvPr id="19" name="Rounded Rectangle 18"/>
+            <a:pPr algn="ctr">
+              <a:defRPr sz="1000" b="1">
+                <a:solidFill>
+                  <a:srgbClr val="F8F6F4"/>
+                </a:solidFill>
+                <a:latin typeface="Arimo"/>
+              </a:defRPr>
+            </a:pPr>
+            <a:r>
+              <a:rPr sz="1000" b="1">
+                <a:solidFill>
+                  <a:srgbClr val="F8F6F4"/>
+                </a:solidFill>
+                <a:latin typeface="Arimo"/>
+              </a:rPr>
+              <a:t>3</a:t>
+            </a:r>
+          </a:p>
+        </p:txBody>
+      </p:sp>
+      <p:sp>
+        <p:nvSpPr>
+          <p:cNvPr id="20" name="TextBox 19"/>
+          <p:cNvSpPr txBox="1"/>
+          <p:nvPr/>
+        </p:nvSpPr>
+        <p:spPr>
+          <a:xfrm>
+            <a:off x="4780597" y="1919882"/>
+            <a:ext cx="1600199" cy="365760"/>
+          </a:xfrm>
+          <a:prstGeom prst="rect">
+            <a:avLst/>
+          </a:prstGeom>
+          <a:noFill/>
+        </p:spPr>
+        <p:txBody>
+          <a:bodyPr wrap="square" tIns="0" bIns="0" lIns="0" rIns="0">
+            <a:spAutoFit/>
+          </a:bodyPr>
+          <a:lstStyle/>
+          <a:p>
+            <a:pPr algn="l">
+              <a:lnSpc>
+                <a:spcPct val="120000"/>
+              </a:lnSpc>
+              <a:defRPr sz="1400" b="1" i="0">
+                <a:solidFill>
+                  <a:srgbClr val="2C3440"/>
+                </a:solidFill>
+                <a:latin typeface="Arimo"/>
+              </a:defRPr>
+            </a:pPr>
+            <a:r>
+              <a:rPr sz="1400" b="1" i="0">
+                <a:solidFill>
+                  <a:srgbClr val="2C3440"/>
+                </a:solidFill>
+                <a:latin typeface="Arimo"/>
+              </a:rPr>
+              <a:t>Ретинальдегид</a:t>
+            </a:r>
+          </a:p>
+        </p:txBody>
+      </p:sp>
+      <p:sp>
+        <p:nvSpPr>
+          <p:cNvPr id="21" name="TextBox 20"/>
+          <p:cNvSpPr txBox="1"/>
+          <p:nvPr/>
+        </p:nvSpPr>
+        <p:spPr>
+          <a:xfrm>
+            <a:off x="4780597" y="2366367"/>
+            <a:ext cx="1600199" cy="1645920"/>
+          </a:xfrm>
+          <a:prstGeom prst="rect">
+            <a:avLst/>
+          </a:prstGeom>
+          <a:noFill/>
+        </p:spPr>
+        <p:txBody>
+          <a:bodyPr wrap="square" tIns="0" bIns="0" lIns="0" rIns="0">
+            <a:spAutoFit/>
+          </a:bodyPr>
+          <a:lstStyle/>
+          <a:p>
+            <a:pPr algn="l">
+              <a:lnSpc>
+                <a:spcPct val="120000"/>
+              </a:lnSpc>
+              <a:defRPr sz="1100" b="0" i="0">
+                <a:solidFill>
+                  <a:srgbClr val="3D4A40"/>
+                </a:solidFill>
+                <a:latin typeface="Arimo"/>
+              </a:defRPr>
+            </a:pPr>
+            <a:r>
+              <a:rPr sz="1100" b="0" i="0">
+                <a:solidFill>
+                  <a:srgbClr val="3D4A40"/>
+                </a:solidFill>
+                <a:latin typeface="Arimo"/>
+              </a:rPr>
+              <a:t>Высокоактивный ретиналь, требует всего 1 шаг конверсии.</a:t>
+            </a:r>
+          </a:p>
+        </p:txBody>
+      </p:sp>
+      <p:sp>
+        <p:nvSpPr>
+          <p:cNvPr id="22" name="Rounded Rectangle 21"/>
           <p:cNvSpPr/>
           <p:nvPr/>
         </p:nvSpPr>
         <p:spPr>
           <a:xfrm>
-            <a:off x="6923722" y="1518046"/>
-            <a:ext cx="548640" cy="274320"/>
+            <a:off x="6786562" y="1339453"/>
+            <a:ext cx="1874519" cy="2834640"/>
           </a:xfrm>
           <a:prstGeom prst="roundRect">
             <a:avLst/>
           </a:prstGeom>
           <a:solidFill>
-            <a:srgbClr val="6D8470"/>
+            <a:srgbClr val="E6D2CA"/>
           </a:solidFill>
-          <a:ln>
-            <a:noFill/>
+          <a:ln w="12700">
+            <a:solidFill>
+              <a:srgbClr val="D7E0CE"/>
+            </a:solidFill>
           </a:ln>
         </p:spPr>
         <p:style>
@@ -5065,6 +5565,49 @@
           <a:bodyPr rtlCol="0" anchor="ctr"/>
           <a:lstStyle/>
           <a:p>
+            <a:pPr algn="ctr"/>
+          </a:p>
+        </p:txBody>
+      </p:sp>
+      <p:sp>
+        <p:nvSpPr>
+          <p:cNvPr id="23" name="Rounded Rectangle 22"/>
+          <p:cNvSpPr/>
+          <p:nvPr/>
+        </p:nvSpPr>
+        <p:spPr>
+          <a:xfrm>
+            <a:off x="6923722" y="1518046"/>
+            <a:ext cx="548640" cy="274320"/>
+          </a:xfrm>
+          <a:prstGeom prst="roundRect">
+            <a:avLst/>
+          </a:prstGeom>
+          <a:solidFill>
+            <a:srgbClr val="6D8470"/>
+          </a:solidFill>
+          <a:ln>
+            <a:noFill/>
+          </a:ln>
+        </p:spPr>
+        <p:style>
+          <a:lnRef idx="1">
+            <a:schemeClr val="accent1"/>
+          </a:lnRef>
+          <a:fillRef idx="3">
+            <a:schemeClr val="accent1"/>
+          </a:fillRef>
+          <a:effectRef idx="2">
+            <a:schemeClr val="accent1"/>
+          </a:effectRef>
+          <a:fontRef idx="minor">
+            <a:schemeClr val="lt1"/>
+          </a:fontRef>
+        </p:style>
+        <p:txBody>
+          <a:bodyPr rtlCol="0" anchor="ctr"/>
+          <a:lstStyle/>
+          <a:p>
             <a:pPr algn="ctr">
               <a:defRPr sz="1000" b="1">
                 <a:solidFill>
@@ -5087,7 +5630,7 @@
       </p:sp>
       <p:sp>
         <p:nvSpPr>
-          <p:cNvPr id="20" name="TextBox 19"/>
+          <p:cNvPr id="24" name="TextBox 23"/>
           <p:cNvSpPr txBox="1"/>
           <p:nvPr/>
         </p:nvSpPr>
@@ -5132,7 +5675,7 @@
       </p:sp>
       <p:sp>
         <p:nvSpPr>
-          <p:cNvPr id="21" name="TextBox 20"/>
+          <p:cNvPr id="25" name="TextBox 24"/>
           <p:cNvSpPr txBox="1"/>
           <p:nvPr/>
         </p:nvSpPr>
@@ -5209,7 +5752,7 @@
         </p:nvSpPr>
         <p:spPr>
           <a:xfrm>
-            <a:off x="357187" y="4643437"/>
+            <a:off x="357187" y="4464843"/>
             <a:ext cx="4572000" cy="274320"/>
           </a:xfrm>
           <a:prstGeom prst="rect">
@@ -5254,7 +5797,7 @@
         </p:nvSpPr>
         <p:spPr>
           <a:xfrm>
-            <a:off x="5029200" y="4643437"/>
+            <a:off x="5029200" y="4464843"/>
             <a:ext cx="3749039" cy="274320"/>
           </a:xfrm>
           <a:prstGeom prst="rect">
@@ -5293,14 +5836,81 @@
       </p:sp>
       <p:sp>
         <p:nvSpPr>
-          <p:cNvPr id="4" name="TextBox 3"/>
+          <p:cNvPr id="4" name="Rectangle 3"/>
+          <p:cNvSpPr/>
+          <p:nvPr/>
+        </p:nvSpPr>
+        <p:spPr>
+          <a:xfrm>
+            <a:off x="357187" y="4732734"/>
+            <a:ext cx="8429625" cy="8929"/>
+          </a:xfrm>
+          <a:prstGeom prst="rect">
+            <a:avLst/>
+          </a:prstGeom>
+          <a:solidFill>
+            <a:srgbClr val="D7E0CE"/>
+          </a:solidFill>
+          <a:ln>
+            <a:noFill/>
+          </a:ln>
+        </p:spPr>
+        <p:style>
+          <a:lnRef idx="1">
+            <a:schemeClr val="accent1"/>
+          </a:lnRef>
+          <a:fillRef idx="3">
+            <a:schemeClr val="accent1"/>
+          </a:fillRef>
+          <a:effectRef idx="2">
+            <a:schemeClr val="accent1"/>
+          </a:effectRef>
+          <a:fontRef idx="minor">
+            <a:schemeClr val="lt1"/>
+          </a:fontRef>
+        </p:style>
+        <p:txBody>
+          <a:bodyPr rtlCol="0" anchor="ctr"/>
+          <a:lstStyle/>
+          <a:p>
+            <a:pPr algn="ctr"/>
+          </a:p>
+        </p:txBody>
+      </p:sp>
+      <p:pic>
+        <p:nvPicPr>
+          <p:cNvPr id="5" name="Picture 4" descr="mark_6D8470.png"/>
+          <p:cNvPicPr>
+            <a:picLocks noChangeAspect="1"/>
+          </p:cNvPicPr>
+          <p:nvPr/>
+        </p:nvPicPr>
+        <p:blipFill>
+          <a:blip r:embed="rId2"/>
+          <a:stretch>
+            <a:fillRect/>
+          </a:stretch>
+        </p:blipFill>
+        <p:spPr>
+          <a:xfrm>
+            <a:off x="357187" y="4848820"/>
+            <a:ext cx="178593" cy="178593"/>
+          </a:xfrm>
+          <a:prstGeom prst="rect">
+            <a:avLst/>
+          </a:prstGeom>
+        </p:spPr>
+      </p:pic>
+      <p:sp>
+        <p:nvSpPr>
+          <p:cNvPr id="6" name="TextBox 5"/>
           <p:cNvSpPr txBox="1"/>
           <p:nvPr/>
         </p:nvSpPr>
         <p:spPr>
           <a:xfrm>
-            <a:off x="357187" y="357187"/>
-            <a:ext cx="8429625" cy="401835"/>
+            <a:off x="607218" y="4830960"/>
+            <a:ext cx="1785937" cy="178593"/>
           </a:xfrm>
           <a:prstGeom prst="rect">
             <a:avLst/>
@@ -5317,35 +5927,35 @@
               <a:lnSpc>
                 <a:spcPct val="120000"/>
               </a:lnSpc>
-              <a:defRPr sz="2600" b="1" i="0">
-                <a:solidFill>
-                  <a:srgbClr val="2C3440"/>
-                </a:solidFill>
-                <a:latin typeface="Arimo"/>
-              </a:defRPr>
-            </a:pPr>
-            <a:r>
-              <a:rPr sz="2600" b="1" i="0">
-                <a:solidFill>
-                  <a:srgbClr val="2C3440"/>
-                </a:solidFill>
-                <a:latin typeface="Arimo"/>
-              </a:rPr>
-              <a:t>Терапия Третиноином</a:t>
-            </a:r>
-          </a:p>
-        </p:txBody>
-      </p:sp>
-      <p:sp>
-        <p:nvSpPr>
-          <p:cNvPr id="5" name="TextBox 4"/>
+              <a:defRPr sz="1100" b="1" i="0">
+                <a:solidFill>
+                  <a:srgbClr val="3D4A40"/>
+                </a:solidFill>
+                <a:latin typeface="Arimo"/>
+              </a:defRPr>
+            </a:pPr>
+            <a:r>
+              <a:rPr sz="1100" b="1" i="0">
+                <a:solidFill>
+                  <a:srgbClr val="3D4A40"/>
+                </a:solidFill>
+                <a:latin typeface="Arimo"/>
+              </a:rPr>
+              <a:t>YM PROSKIN</a:t>
+            </a:r>
+          </a:p>
+        </p:txBody>
+      </p:sp>
+      <p:sp>
+        <p:nvSpPr>
+          <p:cNvPr id="7" name="TextBox 6"/>
           <p:cNvSpPr txBox="1"/>
           <p:nvPr/>
         </p:nvSpPr>
         <p:spPr>
           <a:xfrm>
-            <a:off x="357187" y="803671"/>
-            <a:ext cx="8429625" cy="267890"/>
+            <a:off x="8251031" y="4830960"/>
+            <a:ext cx="535781" cy="178593"/>
           </a:xfrm>
           <a:prstGeom prst="rect">
             <a:avLst/>
@@ -5358,11 +5968,11 @@
           </a:bodyPr>
           <a:lstStyle/>
           <a:p>
-            <a:pPr algn="l">
-              <a:lnSpc>
-                <a:spcPct val="120000"/>
-              </a:lnSpc>
-              <a:defRPr sz="1500" b="0" i="0">
+            <a:pPr algn="r">
+              <a:lnSpc>
+                <a:spcPct val="120000"/>
+              </a:lnSpc>
+              <a:defRPr sz="1100" b="0" i="0">
                 <a:solidFill>
                   <a:srgbClr val="6D8470"/>
                 </a:solidFill>
@@ -5370,27 +5980,27 @@
               </a:defRPr>
             </a:pPr>
             <a:r>
-              <a:rPr sz="1500" b="0" i="0">
+              <a:rPr sz="1100" b="0" i="0">
                 <a:solidFill>
                   <a:srgbClr val="6D8470"/>
                 </a:solidFill>
                 <a:latin typeface="Arimo"/>
               </a:rPr>
-              <a:t>Клинические эффекты золотого стандарта коррекции</a:t>
-            </a:r>
-          </a:p>
-        </p:txBody>
-      </p:sp>
-      <p:sp>
-        <p:nvSpPr>
-          <p:cNvPr id="6" name="TextBox 5"/>
+              <a:t>5</a:t>
+            </a:r>
+          </a:p>
+        </p:txBody>
+      </p:sp>
+      <p:sp>
+        <p:nvSpPr>
+          <p:cNvPr id="8" name="TextBox 7"/>
           <p:cNvSpPr txBox="1"/>
           <p:nvPr/>
         </p:nvSpPr>
         <p:spPr>
           <a:xfrm>
-            <a:off x="357187" y="1339453"/>
-            <a:ext cx="4572000" cy="2926080"/>
+            <a:off x="357187" y="357187"/>
+            <a:ext cx="8429625" cy="401835"/>
           </a:xfrm>
           <a:prstGeom prst="rect">
             <a:avLst/>
@@ -5407,6 +6017,96 @@
               <a:lnSpc>
                 <a:spcPct val="120000"/>
               </a:lnSpc>
+              <a:defRPr sz="2600" b="1" i="0">
+                <a:solidFill>
+                  <a:srgbClr val="2C3440"/>
+                </a:solidFill>
+                <a:latin typeface="Arimo"/>
+              </a:defRPr>
+            </a:pPr>
+            <a:r>
+              <a:rPr sz="2600" b="1" i="0">
+                <a:solidFill>
+                  <a:srgbClr val="2C3440"/>
+                </a:solidFill>
+                <a:latin typeface="Arimo"/>
+              </a:rPr>
+              <a:t>Терапия Третиноином</a:t>
+            </a:r>
+          </a:p>
+        </p:txBody>
+      </p:sp>
+      <p:sp>
+        <p:nvSpPr>
+          <p:cNvPr id="9" name="TextBox 8"/>
+          <p:cNvSpPr txBox="1"/>
+          <p:nvPr/>
+        </p:nvSpPr>
+        <p:spPr>
+          <a:xfrm>
+            <a:off x="357187" y="803671"/>
+            <a:ext cx="8429625" cy="267890"/>
+          </a:xfrm>
+          <a:prstGeom prst="rect">
+            <a:avLst/>
+          </a:prstGeom>
+          <a:noFill/>
+        </p:spPr>
+        <p:txBody>
+          <a:bodyPr wrap="square" tIns="0" bIns="0" lIns="0" rIns="0">
+            <a:spAutoFit/>
+          </a:bodyPr>
+          <a:lstStyle/>
+          <a:p>
+            <a:pPr algn="l">
+              <a:lnSpc>
+                <a:spcPct val="120000"/>
+              </a:lnSpc>
+              <a:defRPr sz="1500" b="0" i="0">
+                <a:solidFill>
+                  <a:srgbClr val="6D8470"/>
+                </a:solidFill>
+                <a:latin typeface="Arimo"/>
+              </a:defRPr>
+            </a:pPr>
+            <a:r>
+              <a:rPr sz="1500" b="0" i="0">
+                <a:solidFill>
+                  <a:srgbClr val="6D8470"/>
+                </a:solidFill>
+                <a:latin typeface="Arimo"/>
+              </a:rPr>
+              <a:t>Клинические эффекты золотого стандарта коррекции</a:t>
+            </a:r>
+          </a:p>
+        </p:txBody>
+      </p:sp>
+      <p:sp>
+        <p:nvSpPr>
+          <p:cNvPr id="10" name="TextBox 9"/>
+          <p:cNvSpPr txBox="1"/>
+          <p:nvPr/>
+        </p:nvSpPr>
+        <p:spPr>
+          <a:xfrm>
+            <a:off x="357187" y="1339453"/>
+            <a:ext cx="4572000" cy="2926080"/>
+          </a:xfrm>
+          <a:prstGeom prst="rect">
+            <a:avLst/>
+          </a:prstGeom>
+          <a:noFill/>
+        </p:spPr>
+        <p:txBody>
+          <a:bodyPr wrap="square" tIns="0" bIns="0" lIns="0" rIns="0">
+            <a:spAutoFit/>
+          </a:bodyPr>
+          <a:lstStyle/>
+          <a:p>
+            <a:pPr algn="l">
+              <a:lnSpc>
+                <a:spcPct val="120000"/>
+              </a:lnSpc>
               <a:defRPr sz="1500" b="0" i="0">
                 <a:solidFill>
                   <a:srgbClr val="3D4A40"/>
@@ -5498,14 +6198,14 @@
       </p:sp>
       <p:pic>
         <p:nvPicPr>
-          <p:cNvPr id="7" name="Picture 6" descr="skin_layers_turnover.png"/>
+          <p:cNvPr id="11" name="Picture 10" descr="skin_layers_turnover.png"/>
           <p:cNvPicPr>
             <a:picLocks noChangeAspect="1"/>
           </p:cNvPicPr>
           <p:nvPr/>
         </p:nvPicPr>
         <p:blipFill>
-          <a:blip r:embed="rId2"/>
+          <a:blip r:embed="rId3"/>
           <a:stretch>
             <a:fillRect/>
           </a:stretch>
@@ -5554,7 +6254,7 @@
         </p:nvSpPr>
         <p:spPr>
           <a:xfrm>
-            <a:off x="357187" y="4643437"/>
+            <a:off x="357187" y="4464843"/>
             <a:ext cx="4572000" cy="274320"/>
           </a:xfrm>
           <a:prstGeom prst="rect">
@@ -5599,7 +6299,7 @@
         </p:nvSpPr>
         <p:spPr>
           <a:xfrm>
-            <a:off x="5029200" y="4643437"/>
+            <a:off x="5029200" y="4464843"/>
             <a:ext cx="3749039" cy="274320"/>
           </a:xfrm>
           <a:prstGeom prst="rect">
@@ -5638,115 +6338,23 @@
       </p:sp>
       <p:sp>
         <p:nvSpPr>
-          <p:cNvPr id="4" name="TextBox 3"/>
-          <p:cNvSpPr txBox="1"/>
-          <p:nvPr/>
-        </p:nvSpPr>
-        <p:spPr>
-          <a:xfrm>
-            <a:off x="357187" y="357187"/>
-            <a:ext cx="8429625" cy="401835"/>
-          </a:xfrm>
-          <a:prstGeom prst="rect">
-            <a:avLst/>
-          </a:prstGeom>
-          <a:noFill/>
-        </p:spPr>
-        <p:txBody>
-          <a:bodyPr wrap="square" tIns="0" bIns="0" lIns="0" rIns="0">
-            <a:spAutoFit/>
-          </a:bodyPr>
-          <a:lstStyle/>
-          <a:p>
-            <a:pPr algn="l">
-              <a:lnSpc>
-                <a:spcPct val="120000"/>
-              </a:lnSpc>
-              <a:defRPr sz="2600" b="1" i="0">
-                <a:solidFill>
-                  <a:srgbClr val="2C3440"/>
-                </a:solidFill>
-                <a:latin typeface="Arimo"/>
-              </a:defRPr>
-            </a:pPr>
-            <a:r>
-              <a:rPr sz="2600" b="1" i="0">
-                <a:solidFill>
-                  <a:srgbClr val="2C3440"/>
-                </a:solidFill>
-                <a:latin typeface="Arimo"/>
-              </a:rPr>
-              <a:t>Сравнение Селективных Форм</a:t>
-            </a:r>
-          </a:p>
-        </p:txBody>
-      </p:sp>
-      <p:sp>
-        <p:nvSpPr>
-          <p:cNvPr id="5" name="TextBox 4"/>
-          <p:cNvSpPr txBox="1"/>
-          <p:nvPr/>
-        </p:nvSpPr>
-        <p:spPr>
-          <a:xfrm>
-            <a:off x="357187" y="803671"/>
-            <a:ext cx="8429625" cy="267890"/>
-          </a:xfrm>
-          <a:prstGeom prst="rect">
-            <a:avLst/>
-          </a:prstGeom>
-          <a:noFill/>
-        </p:spPr>
-        <p:txBody>
-          <a:bodyPr wrap="square" tIns="0" bIns="0" lIns="0" rIns="0">
-            <a:spAutoFit/>
-          </a:bodyPr>
-          <a:lstStyle/>
-          <a:p>
-            <a:pPr algn="l">
-              <a:lnSpc>
-                <a:spcPct val="120000"/>
-              </a:lnSpc>
-              <a:defRPr sz="1500" b="0" i="0">
-                <a:solidFill>
-                  <a:srgbClr val="6D8470"/>
-                </a:solidFill>
-                <a:latin typeface="Arimo"/>
-              </a:defRPr>
-            </a:pPr>
-            <a:r>
-              <a:rPr sz="1500" b="0" i="0">
-                <a:solidFill>
-                  <a:srgbClr val="6D8470"/>
-                </a:solidFill>
-                <a:latin typeface="Arimo"/>
-              </a:rPr>
-              <a:t>Адапален против Тазаротена</a:t>
-            </a:r>
-          </a:p>
-        </p:txBody>
-      </p:sp>
-      <p:sp>
-        <p:nvSpPr>
-          <p:cNvPr id="6" name="Rounded Rectangle 5"/>
+          <p:cNvPr id="4" name="Rectangle 3"/>
           <p:cNvSpPr/>
           <p:nvPr/>
         </p:nvSpPr>
         <p:spPr>
           <a:xfrm>
-            <a:off x="357187" y="1339453"/>
-            <a:ext cx="4032504" cy="2834640"/>
-          </a:xfrm>
-          <a:prstGeom prst="roundRect">
+            <a:off x="357187" y="4732734"/>
+            <a:ext cx="8429625" cy="8929"/>
+          </a:xfrm>
+          <a:prstGeom prst="rect">
             <a:avLst/>
           </a:prstGeom>
           <a:solidFill>
-            <a:srgbClr val="E6D2CA"/>
+            <a:srgbClr val="D7E0CE"/>
           </a:solidFill>
-          <a:ln w="12700">
-            <a:solidFill>
-              <a:srgbClr val="D7E0CE"/>
-            </a:solidFill>
+          <a:ln>
+            <a:noFill/>
           </a:ln>
         </p:spPr>
         <p:style>
@@ -5771,16 +6379,40 @@
           </a:p>
         </p:txBody>
       </p:sp>
-      <p:sp>
-        <p:nvSpPr>
-          <p:cNvPr id="7" name="TextBox 6"/>
+      <p:pic>
+        <p:nvPicPr>
+          <p:cNvPr id="5" name="Picture 4" descr="mark_6D8470.png"/>
+          <p:cNvPicPr>
+            <a:picLocks noChangeAspect="1"/>
+          </p:cNvPicPr>
+          <p:nvPr/>
+        </p:nvPicPr>
+        <p:blipFill>
+          <a:blip r:embed="rId2"/>
+          <a:stretch>
+            <a:fillRect/>
+          </a:stretch>
+        </p:blipFill>
+        <p:spPr>
+          <a:xfrm>
+            <a:off x="357187" y="4848820"/>
+            <a:ext cx="178593" cy="178593"/>
+          </a:xfrm>
+          <a:prstGeom prst="rect">
+            <a:avLst/>
+          </a:prstGeom>
+        </p:spPr>
+      </p:pic>
+      <p:sp>
+        <p:nvSpPr>
+          <p:cNvPr id="6" name="TextBox 5"/>
           <p:cNvSpPr txBox="1"/>
           <p:nvPr/>
         </p:nvSpPr>
         <p:spPr>
           <a:xfrm>
-            <a:off x="535781" y="1518046"/>
-            <a:ext cx="3666744" cy="365760"/>
+            <a:off x="607218" y="4830960"/>
+            <a:ext cx="1785937" cy="178593"/>
           </a:xfrm>
           <a:prstGeom prst="rect">
             <a:avLst/>
@@ -5797,35 +6429,35 @@
               <a:lnSpc>
                 <a:spcPct val="120000"/>
               </a:lnSpc>
-              <a:defRPr sz="1800" b="1" i="0">
-                <a:solidFill>
-                  <a:srgbClr val="6D8470"/>
-                </a:solidFill>
-                <a:latin typeface="Arimo"/>
-              </a:defRPr>
-            </a:pPr>
-            <a:r>
-              <a:rPr sz="1800" b="1" i="0">
-                <a:solidFill>
-                  <a:srgbClr val="6D8470"/>
-                </a:solidFill>
-                <a:latin typeface="Arimo"/>
-              </a:rPr>
-              <a:t>Адапален</a:t>
-            </a:r>
-          </a:p>
-        </p:txBody>
-      </p:sp>
-      <p:sp>
-        <p:nvSpPr>
-          <p:cNvPr id="8" name="TextBox 7"/>
+              <a:defRPr sz="1100" b="1" i="0">
+                <a:solidFill>
+                  <a:srgbClr val="3D4A40"/>
+                </a:solidFill>
+                <a:latin typeface="Arimo"/>
+              </a:defRPr>
+            </a:pPr>
+            <a:r>
+              <a:rPr sz="1100" b="1" i="0">
+                <a:solidFill>
+                  <a:srgbClr val="3D4A40"/>
+                </a:solidFill>
+                <a:latin typeface="Arimo"/>
+              </a:rPr>
+              <a:t>YM PROSKIN</a:t>
+            </a:r>
+          </a:p>
+        </p:txBody>
+      </p:sp>
+      <p:sp>
+        <p:nvSpPr>
+          <p:cNvPr id="7" name="TextBox 6"/>
           <p:cNvSpPr txBox="1"/>
           <p:nvPr/>
         </p:nvSpPr>
         <p:spPr>
           <a:xfrm>
-            <a:off x="535781" y="1964531"/>
-            <a:ext cx="3666744" cy="2011680"/>
+            <a:off x="8251031" y="4830960"/>
+            <a:ext cx="535781" cy="178593"/>
           </a:xfrm>
           <a:prstGeom prst="rect">
             <a:avLst/>
@@ -5838,13 +6470,103 @@
           </a:bodyPr>
           <a:lstStyle/>
           <a:p>
+            <a:pPr algn="r">
+              <a:lnSpc>
+                <a:spcPct val="120000"/>
+              </a:lnSpc>
+              <a:defRPr sz="1100" b="0" i="0">
+                <a:solidFill>
+                  <a:srgbClr val="6D8470"/>
+                </a:solidFill>
+                <a:latin typeface="Arimo"/>
+              </a:defRPr>
+            </a:pPr>
+            <a:r>
+              <a:rPr sz="1100" b="0" i="0">
+                <a:solidFill>
+                  <a:srgbClr val="6D8470"/>
+                </a:solidFill>
+                <a:latin typeface="Arimo"/>
+              </a:rPr>
+              <a:t>6</a:t>
+            </a:r>
+          </a:p>
+        </p:txBody>
+      </p:sp>
+      <p:sp>
+        <p:nvSpPr>
+          <p:cNvPr id="8" name="TextBox 7"/>
+          <p:cNvSpPr txBox="1"/>
+          <p:nvPr/>
+        </p:nvSpPr>
+        <p:spPr>
+          <a:xfrm>
+            <a:off x="357187" y="357187"/>
+            <a:ext cx="8429625" cy="401835"/>
+          </a:xfrm>
+          <a:prstGeom prst="rect">
+            <a:avLst/>
+          </a:prstGeom>
+          <a:noFill/>
+        </p:spPr>
+        <p:txBody>
+          <a:bodyPr wrap="square" tIns="0" bIns="0" lIns="0" rIns="0">
+            <a:spAutoFit/>
+          </a:bodyPr>
+          <a:lstStyle/>
+          <a:p>
             <a:pPr algn="l">
               <a:lnSpc>
                 <a:spcPct val="120000"/>
               </a:lnSpc>
+              <a:defRPr sz="2600" b="1" i="0">
+                <a:solidFill>
+                  <a:srgbClr val="2C3440"/>
+                </a:solidFill>
+                <a:latin typeface="Arimo"/>
+              </a:defRPr>
+            </a:pPr>
+            <a:r>
+              <a:rPr sz="2600" b="1" i="0">
+                <a:solidFill>
+                  <a:srgbClr val="2C3440"/>
+                </a:solidFill>
+                <a:latin typeface="Arimo"/>
+              </a:rPr>
+              <a:t>Сравнение Селективных Форм</a:t>
+            </a:r>
+          </a:p>
+        </p:txBody>
+      </p:sp>
+      <p:sp>
+        <p:nvSpPr>
+          <p:cNvPr id="9" name="TextBox 8"/>
+          <p:cNvSpPr txBox="1"/>
+          <p:nvPr/>
+        </p:nvSpPr>
+        <p:spPr>
+          <a:xfrm>
+            <a:off x="357187" y="803671"/>
+            <a:ext cx="8429625" cy="267890"/>
+          </a:xfrm>
+          <a:prstGeom prst="rect">
+            <a:avLst/>
+          </a:prstGeom>
+          <a:noFill/>
+        </p:spPr>
+        <p:txBody>
+          <a:bodyPr wrap="square" tIns="0" bIns="0" lIns="0" rIns="0">
+            <a:spAutoFit/>
+          </a:bodyPr>
+          <a:lstStyle/>
+          <a:p>
+            <a:pPr algn="l">
+              <a:lnSpc>
+                <a:spcPct val="120000"/>
+              </a:lnSpc>
               <a:defRPr sz="1500" b="0" i="0">
                 <a:solidFill>
-                  <a:srgbClr val="3D4A40"/>
+                  <a:srgbClr val="6D8470"/>
                 </a:solidFill>
                 <a:latin typeface="Arimo"/>
               </a:defRPr>
@@ -5852,24 +6574,24 @@
             <a:r>
               <a:rPr sz="1500" b="0" i="0">
                 <a:solidFill>
-                  <a:srgbClr val="3D4A40"/>
-                </a:solidFill>
-                <a:latin typeface="Arimo"/>
-              </a:rPr>
-              <a:t>Селективно связывается с rar-beta и rar-gamma рецепторами, снижает риск раздражений.</a:t>
-            </a:r>
-          </a:p>
-        </p:txBody>
-      </p:sp>
-      <p:sp>
-        <p:nvSpPr>
-          <p:cNvPr id="9" name="Rounded Rectangle 8"/>
+                  <a:srgbClr val="6D8470"/>
+                </a:solidFill>
+                <a:latin typeface="Arimo"/>
+              </a:rPr>
+              <a:t>Адапален против Тазаротена</a:t>
+            </a:r>
+          </a:p>
+        </p:txBody>
+      </p:sp>
+      <p:sp>
+        <p:nvSpPr>
+          <p:cNvPr id="10" name="Rounded Rectangle 9"/>
           <p:cNvSpPr/>
           <p:nvPr/>
         </p:nvSpPr>
         <p:spPr>
           <a:xfrm>
-            <a:off x="4750593" y="1339453"/>
+            <a:off x="357187" y="1339453"/>
             <a:ext cx="4032504" cy="2834640"/>
           </a:xfrm>
           <a:prstGeom prst="roundRect">
@@ -5908,13 +6630,13 @@
       </p:sp>
       <p:sp>
         <p:nvSpPr>
-          <p:cNvPr id="10" name="TextBox 9"/>
+          <p:cNvPr id="11" name="TextBox 10"/>
           <p:cNvSpPr txBox="1"/>
           <p:nvPr/>
         </p:nvSpPr>
         <p:spPr>
           <a:xfrm>
-            <a:off x="4929187" y="1518046"/>
+            <a:off x="535781" y="1518046"/>
             <a:ext cx="3666744" cy="365760"/>
           </a:xfrm>
           <a:prstGeom prst="rect">
@@ -5946,6 +6668,141 @@
                 </a:solidFill>
                 <a:latin typeface="Arimo"/>
               </a:rPr>
+              <a:t>Адапален</a:t>
+            </a:r>
+          </a:p>
+        </p:txBody>
+      </p:sp>
+      <p:sp>
+        <p:nvSpPr>
+          <p:cNvPr id="12" name="TextBox 11"/>
+          <p:cNvSpPr txBox="1"/>
+          <p:nvPr/>
+        </p:nvSpPr>
+        <p:spPr>
+          <a:xfrm>
+            <a:off x="535781" y="1964531"/>
+            <a:ext cx="3666744" cy="2011680"/>
+          </a:xfrm>
+          <a:prstGeom prst="rect">
+            <a:avLst/>
+          </a:prstGeom>
+          <a:noFill/>
+        </p:spPr>
+        <p:txBody>
+          <a:bodyPr wrap="square" tIns="0" bIns="0" lIns="0" rIns="0">
+            <a:spAutoFit/>
+          </a:bodyPr>
+          <a:lstStyle/>
+          <a:p>
+            <a:pPr algn="l">
+              <a:lnSpc>
+                <a:spcPct val="120000"/>
+              </a:lnSpc>
+              <a:defRPr sz="1500" b="0" i="0">
+                <a:solidFill>
+                  <a:srgbClr val="3D4A40"/>
+                </a:solidFill>
+                <a:latin typeface="Arimo"/>
+              </a:defRPr>
+            </a:pPr>
+            <a:r>
+              <a:rPr sz="1500" b="0" i="0">
+                <a:solidFill>
+                  <a:srgbClr val="3D4A40"/>
+                </a:solidFill>
+                <a:latin typeface="Arimo"/>
+              </a:rPr>
+              <a:t>Селективно связывается с rar-beta и rar-gamma рецепторами, снижает риск раздражений.</a:t>
+            </a:r>
+          </a:p>
+        </p:txBody>
+      </p:sp>
+      <p:sp>
+        <p:nvSpPr>
+          <p:cNvPr id="13" name="Rounded Rectangle 12"/>
+          <p:cNvSpPr/>
+          <p:nvPr/>
+        </p:nvSpPr>
+        <p:spPr>
+          <a:xfrm>
+            <a:off x="4750593" y="1339453"/>
+            <a:ext cx="4032504" cy="2834640"/>
+          </a:xfrm>
+          <a:prstGeom prst="roundRect">
+            <a:avLst/>
+          </a:prstGeom>
+          <a:solidFill>
+            <a:srgbClr val="E6D2CA"/>
+          </a:solidFill>
+          <a:ln w="12700">
+            <a:solidFill>
+              <a:srgbClr val="D7E0CE"/>
+            </a:solidFill>
+          </a:ln>
+        </p:spPr>
+        <p:style>
+          <a:lnRef idx="1">
+            <a:schemeClr val="accent1"/>
+          </a:lnRef>
+          <a:fillRef idx="3">
+            <a:schemeClr val="accent1"/>
+          </a:fillRef>
+          <a:effectRef idx="2">
+            <a:schemeClr val="accent1"/>
+          </a:effectRef>
+          <a:fontRef idx="minor">
+            <a:schemeClr val="lt1"/>
+          </a:fontRef>
+        </p:style>
+        <p:txBody>
+          <a:bodyPr rtlCol="0" anchor="ctr"/>
+          <a:lstStyle/>
+          <a:p>
+            <a:pPr algn="ctr"/>
+          </a:p>
+        </p:txBody>
+      </p:sp>
+      <p:sp>
+        <p:nvSpPr>
+          <p:cNvPr id="14" name="TextBox 13"/>
+          <p:cNvSpPr txBox="1"/>
+          <p:nvPr/>
+        </p:nvSpPr>
+        <p:spPr>
+          <a:xfrm>
+            <a:off x="4929187" y="1518046"/>
+            <a:ext cx="3666744" cy="365760"/>
+          </a:xfrm>
+          <a:prstGeom prst="rect">
+            <a:avLst/>
+          </a:prstGeom>
+          <a:noFill/>
+        </p:spPr>
+        <p:txBody>
+          <a:bodyPr wrap="square" tIns="0" bIns="0" lIns="0" rIns="0">
+            <a:spAutoFit/>
+          </a:bodyPr>
+          <a:lstStyle/>
+          <a:p>
+            <a:pPr algn="l">
+              <a:lnSpc>
+                <a:spcPct val="120000"/>
+              </a:lnSpc>
+              <a:defRPr sz="1800" b="1" i="0">
+                <a:solidFill>
+                  <a:srgbClr val="6D8470"/>
+                </a:solidFill>
+                <a:latin typeface="Arimo"/>
+              </a:defRPr>
+            </a:pPr>
+            <a:r>
+              <a:rPr sz="1800" b="1" i="0">
+                <a:solidFill>
+                  <a:srgbClr val="6D8470"/>
+                </a:solidFill>
+                <a:latin typeface="Arimo"/>
+              </a:rPr>
               <a:t>Тазаротен</a:t>
             </a:r>
           </a:p>
@@ -5953,7 +6810,7 @@
       </p:sp>
       <p:sp>
         <p:nvSpPr>
-          <p:cNvPr id="11" name="TextBox 10"/>
+          <p:cNvPr id="15" name="TextBox 14"/>
           <p:cNvSpPr txBox="1"/>
           <p:nvPr/>
         </p:nvSpPr>
@@ -6030,7 +6887,7 @@
         </p:nvSpPr>
         <p:spPr>
           <a:xfrm>
-            <a:off x="357187" y="4643437"/>
+            <a:off x="357187" y="4464843"/>
             <a:ext cx="4572000" cy="274320"/>
           </a:xfrm>
           <a:prstGeom prst="rect">
@@ -6075,7 +6932,7 @@
         </p:nvSpPr>
         <p:spPr>
           <a:xfrm>
-            <a:off x="5029200" y="4643437"/>
+            <a:off x="5029200" y="4464843"/>
             <a:ext cx="3749039" cy="274320"/>
           </a:xfrm>
           <a:prstGeom prst="rect">
@@ -6114,115 +6971,23 @@
       </p:sp>
       <p:sp>
         <p:nvSpPr>
-          <p:cNvPr id="4" name="TextBox 3"/>
-          <p:cNvSpPr txBox="1"/>
-          <p:nvPr/>
-        </p:nvSpPr>
-        <p:spPr>
-          <a:xfrm>
-            <a:off x="357187" y="357187"/>
-            <a:ext cx="8429625" cy="401835"/>
-          </a:xfrm>
-          <a:prstGeom prst="rect">
-            <a:avLst/>
-          </a:prstGeom>
-          <a:noFill/>
-        </p:spPr>
-        <p:txBody>
-          <a:bodyPr wrap="square" tIns="0" bIns="0" lIns="0" rIns="0">
-            <a:spAutoFit/>
-          </a:bodyPr>
-          <a:lstStyle/>
-          <a:p>
-            <a:pPr algn="l">
-              <a:lnSpc>
-                <a:spcPct val="120000"/>
-              </a:lnSpc>
-              <a:defRPr sz="2600" b="1" i="0">
-                <a:solidFill>
-                  <a:srgbClr val="2C3440"/>
-                </a:solidFill>
-                <a:latin typeface="Arimo"/>
-              </a:defRPr>
-            </a:pPr>
-            <a:r>
-              <a:rPr sz="2600" b="1" i="0">
-                <a:solidFill>
-                  <a:srgbClr val="2C3440"/>
-                </a:solidFill>
-                <a:latin typeface="Arimo"/>
-              </a:rPr>
-              <a:t>Безрецептурные Формы</a:t>
-            </a:r>
-          </a:p>
-        </p:txBody>
-      </p:sp>
-      <p:sp>
-        <p:nvSpPr>
-          <p:cNvPr id="5" name="TextBox 4"/>
-          <p:cNvSpPr txBox="1"/>
-          <p:nvPr/>
-        </p:nvSpPr>
-        <p:spPr>
-          <a:xfrm>
-            <a:off x="357187" y="803671"/>
-            <a:ext cx="8429625" cy="267890"/>
-          </a:xfrm>
-          <a:prstGeom prst="rect">
-            <a:avLst/>
-          </a:prstGeom>
-          <a:noFill/>
-        </p:spPr>
-        <p:txBody>
-          <a:bodyPr wrap="square" tIns="0" bIns="0" lIns="0" rIns="0">
-            <a:spAutoFit/>
-          </a:bodyPr>
-          <a:lstStyle/>
-          <a:p>
-            <a:pPr algn="l">
-              <a:lnSpc>
-                <a:spcPct val="120000"/>
-              </a:lnSpc>
-              <a:defRPr sz="1500" b="0" i="0">
-                <a:solidFill>
-                  <a:srgbClr val="6D8470"/>
-                </a:solidFill>
-                <a:latin typeface="Arimo"/>
-              </a:defRPr>
-            </a:pPr>
-            <a:r>
-              <a:rPr sz="1500" b="0" i="0">
-                <a:solidFill>
-                  <a:srgbClr val="6D8470"/>
-                </a:solidFill>
-                <a:latin typeface="Arimo"/>
-              </a:rPr>
-              <a:t>Биологическая активность ретинола, ретиналя и эфиров</a:t>
-            </a:r>
-          </a:p>
-        </p:txBody>
-      </p:sp>
-      <p:sp>
-        <p:nvSpPr>
-          <p:cNvPr id="6" name="Rounded Rectangle 5"/>
+          <p:cNvPr id="4" name="Rectangle 3"/>
           <p:cNvSpPr/>
           <p:nvPr/>
         </p:nvSpPr>
         <p:spPr>
           <a:xfrm>
-            <a:off x="357187" y="1339453"/>
-            <a:ext cx="2624328" cy="2834640"/>
-          </a:xfrm>
-          <a:prstGeom prst="roundRect">
+            <a:off x="357187" y="4732734"/>
+            <a:ext cx="8429625" cy="8929"/>
+          </a:xfrm>
+          <a:prstGeom prst="rect">
             <a:avLst/>
           </a:prstGeom>
           <a:solidFill>
-            <a:srgbClr val="E6D2CA"/>
+            <a:srgbClr val="D7E0CE"/>
           </a:solidFill>
-          <a:ln w="12700">
-            <a:solidFill>
-              <a:srgbClr val="D7E0CE"/>
-            </a:solidFill>
+          <a:ln>
+            <a:noFill/>
           </a:ln>
         </p:spPr>
         <p:style>
@@ -6247,16 +7012,40 @@
           </a:p>
         </p:txBody>
       </p:sp>
-      <p:sp>
-        <p:nvSpPr>
-          <p:cNvPr id="7" name="TextBox 6"/>
+      <p:pic>
+        <p:nvPicPr>
+          <p:cNvPr id="5" name="Picture 4" descr="mark_6D8470.png"/>
+          <p:cNvPicPr>
+            <a:picLocks noChangeAspect="1"/>
+          </p:cNvPicPr>
+          <p:nvPr/>
+        </p:nvPicPr>
+        <p:blipFill>
+          <a:blip r:embed="rId2"/>
+          <a:stretch>
+            <a:fillRect/>
+          </a:stretch>
+        </p:blipFill>
+        <p:spPr>
+          <a:xfrm>
+            <a:off x="357187" y="4848820"/>
+            <a:ext cx="178593" cy="178593"/>
+          </a:xfrm>
+          <a:prstGeom prst="rect">
+            <a:avLst/>
+          </a:prstGeom>
+        </p:spPr>
+      </p:pic>
+      <p:sp>
+        <p:nvSpPr>
+          <p:cNvPr id="6" name="TextBox 5"/>
           <p:cNvSpPr txBox="1"/>
           <p:nvPr/>
         </p:nvSpPr>
         <p:spPr>
           <a:xfrm>
-            <a:off x="540067" y="1518046"/>
-            <a:ext cx="2258568" cy="457200"/>
+            <a:off x="607218" y="4830960"/>
+            <a:ext cx="1785937" cy="178593"/>
           </a:xfrm>
           <a:prstGeom prst="rect">
             <a:avLst/>
@@ -6273,35 +7062,35 @@
               <a:lnSpc>
                 <a:spcPct val="120000"/>
               </a:lnSpc>
-              <a:defRPr sz="1800" b="1" i="0">
-                <a:solidFill>
-                  <a:srgbClr val="2C3440"/>
-                </a:solidFill>
-                <a:latin typeface="Arimo"/>
-              </a:defRPr>
-            </a:pPr>
-            <a:r>
-              <a:rPr sz="1800" b="1" i="0">
-                <a:solidFill>
-                  <a:srgbClr val="2C3440"/>
-                </a:solidFill>
-                <a:latin typeface="Arimo"/>
-              </a:rPr>
-              <a:t>Ретинальдегид</a:t>
-            </a:r>
-          </a:p>
-        </p:txBody>
-      </p:sp>
-      <p:sp>
-        <p:nvSpPr>
-          <p:cNvPr id="8" name="TextBox 7"/>
+              <a:defRPr sz="1100" b="1" i="0">
+                <a:solidFill>
+                  <a:srgbClr val="3D4A40"/>
+                </a:solidFill>
+                <a:latin typeface="Arimo"/>
+              </a:defRPr>
+            </a:pPr>
+            <a:r>
+              <a:rPr sz="1100" b="1" i="0">
+                <a:solidFill>
+                  <a:srgbClr val="3D4A40"/>
+                </a:solidFill>
+                <a:latin typeface="Arimo"/>
+              </a:rPr>
+              <a:t>YM PROSKIN</a:t>
+            </a:r>
+          </a:p>
+        </p:txBody>
+      </p:sp>
+      <p:sp>
+        <p:nvSpPr>
+          <p:cNvPr id="7" name="TextBox 6"/>
           <p:cNvSpPr txBox="1"/>
           <p:nvPr/>
         </p:nvSpPr>
         <p:spPr>
           <a:xfrm>
-            <a:off x="540067" y="2053828"/>
-            <a:ext cx="2258568" cy="1920240"/>
+            <a:off x="8251031" y="4830960"/>
+            <a:ext cx="535781" cy="178593"/>
           </a:xfrm>
           <a:prstGeom prst="rect">
             <a:avLst/>
@@ -6314,38 +7103,128 @@
           </a:bodyPr>
           <a:lstStyle/>
           <a:p>
+            <a:pPr algn="r">
+              <a:lnSpc>
+                <a:spcPct val="120000"/>
+              </a:lnSpc>
+              <a:defRPr sz="1100" b="0" i="0">
+                <a:solidFill>
+                  <a:srgbClr val="6D8470"/>
+                </a:solidFill>
+                <a:latin typeface="Arimo"/>
+              </a:defRPr>
+            </a:pPr>
+            <a:r>
+              <a:rPr sz="1100" b="0" i="0">
+                <a:solidFill>
+                  <a:srgbClr val="6D8470"/>
+                </a:solidFill>
+                <a:latin typeface="Arimo"/>
+              </a:rPr>
+              <a:t>7</a:t>
+            </a:r>
+          </a:p>
+        </p:txBody>
+      </p:sp>
+      <p:sp>
+        <p:nvSpPr>
+          <p:cNvPr id="8" name="TextBox 7"/>
+          <p:cNvSpPr txBox="1"/>
+          <p:nvPr/>
+        </p:nvSpPr>
+        <p:spPr>
+          <a:xfrm>
+            <a:off x="357187" y="357187"/>
+            <a:ext cx="8429625" cy="401835"/>
+          </a:xfrm>
+          <a:prstGeom prst="rect">
+            <a:avLst/>
+          </a:prstGeom>
+          <a:noFill/>
+        </p:spPr>
+        <p:txBody>
+          <a:bodyPr wrap="square" tIns="0" bIns="0" lIns="0" rIns="0">
+            <a:spAutoFit/>
+          </a:bodyPr>
+          <a:lstStyle/>
+          <a:p>
             <a:pPr algn="l">
               <a:lnSpc>
                 <a:spcPct val="120000"/>
               </a:lnSpc>
-              <a:defRPr sz="1300" b="0" i="0">
-                <a:solidFill>
-                  <a:srgbClr val="3D4A40"/>
-                </a:solidFill>
-                <a:latin typeface="Arimo"/>
-              </a:defRPr>
-            </a:pPr>
-            <a:r>
-              <a:rPr sz="1300" b="0" i="0">
-                <a:solidFill>
-                  <a:srgbClr val="3D4A40"/>
-                </a:solidFill>
-                <a:latin typeface="Arimo"/>
-              </a:rPr>
-              <a:t>Улучшает гидратацию и эластичность кожи, требует одного метаболического шага.</a:t>
-            </a:r>
-          </a:p>
-        </p:txBody>
-      </p:sp>
-      <p:sp>
-        <p:nvSpPr>
-          <p:cNvPr id="9" name="Rounded Rectangle 8"/>
+              <a:defRPr sz="2600" b="1" i="0">
+                <a:solidFill>
+                  <a:srgbClr val="2C3440"/>
+                </a:solidFill>
+                <a:latin typeface="Arimo"/>
+              </a:defRPr>
+            </a:pPr>
+            <a:r>
+              <a:rPr sz="2600" b="1" i="0">
+                <a:solidFill>
+                  <a:srgbClr val="2C3440"/>
+                </a:solidFill>
+                <a:latin typeface="Arimo"/>
+              </a:rPr>
+              <a:t>Безрецептурные Формы</a:t>
+            </a:r>
+          </a:p>
+        </p:txBody>
+      </p:sp>
+      <p:sp>
+        <p:nvSpPr>
+          <p:cNvPr id="9" name="TextBox 8"/>
+          <p:cNvSpPr txBox="1"/>
+          <p:nvPr/>
+        </p:nvSpPr>
+        <p:spPr>
+          <a:xfrm>
+            <a:off x="357187" y="803671"/>
+            <a:ext cx="8429625" cy="267890"/>
+          </a:xfrm>
+          <a:prstGeom prst="rect">
+            <a:avLst/>
+          </a:prstGeom>
+          <a:noFill/>
+        </p:spPr>
+        <p:txBody>
+          <a:bodyPr wrap="square" tIns="0" bIns="0" lIns="0" rIns="0">
+            <a:spAutoFit/>
+          </a:bodyPr>
+          <a:lstStyle/>
+          <a:p>
+            <a:pPr algn="l">
+              <a:lnSpc>
+                <a:spcPct val="120000"/>
+              </a:lnSpc>
+              <a:defRPr sz="1500" b="0" i="0">
+                <a:solidFill>
+                  <a:srgbClr val="6D8470"/>
+                </a:solidFill>
+                <a:latin typeface="Arimo"/>
+              </a:defRPr>
+            </a:pPr>
+            <a:r>
+              <a:rPr sz="1500" b="0" i="0">
+                <a:solidFill>
+                  <a:srgbClr val="6D8470"/>
+                </a:solidFill>
+                <a:latin typeface="Arimo"/>
+              </a:rPr>
+              <a:t>Биологическая активность ретинола, ретиналя и эфиров</a:t>
+            </a:r>
+          </a:p>
+        </p:txBody>
+      </p:sp>
+      <p:sp>
+        <p:nvSpPr>
+          <p:cNvPr id="10" name="Rounded Rectangle 9"/>
           <p:cNvSpPr/>
           <p:nvPr/>
         </p:nvSpPr>
         <p:spPr>
           <a:xfrm>
-            <a:off x="3259335" y="1339453"/>
+            <a:off x="357187" y="1339453"/>
             <a:ext cx="2624328" cy="2834640"/>
           </a:xfrm>
           <a:prstGeom prst="roundRect">
@@ -6384,13 +7263,13 @@
       </p:sp>
       <p:sp>
         <p:nvSpPr>
-          <p:cNvPr id="10" name="TextBox 9"/>
+          <p:cNvPr id="11" name="TextBox 10"/>
           <p:cNvSpPr txBox="1"/>
           <p:nvPr/>
         </p:nvSpPr>
         <p:spPr>
           <a:xfrm>
-            <a:off x="3442215" y="1518046"/>
+            <a:off x="540067" y="1518046"/>
             <a:ext cx="2258568" cy="457200"/>
           </a:xfrm>
           <a:prstGeom prst="rect">
@@ -6422,20 +7301,20 @@
                 </a:solidFill>
                 <a:latin typeface="Arimo"/>
               </a:rPr>
-              <a:t>Ретинол</a:t>
-            </a:r>
-          </a:p>
-        </p:txBody>
-      </p:sp>
-      <p:sp>
-        <p:nvSpPr>
-          <p:cNvPr id="11" name="TextBox 10"/>
+              <a:t>Ретинальдегид</a:t>
+            </a:r>
+          </a:p>
+        </p:txBody>
+      </p:sp>
+      <p:sp>
+        <p:nvSpPr>
+          <p:cNvPr id="12" name="TextBox 11"/>
           <p:cNvSpPr txBox="1"/>
           <p:nvPr/>
         </p:nvSpPr>
         <p:spPr>
           <a:xfrm>
-            <a:off x="3442215" y="2053828"/>
+            <a:off x="540067" y="2053828"/>
             <a:ext cx="2258568" cy="1920240"/>
           </a:xfrm>
           <a:prstGeom prst="rect">
@@ -6467,20 +7346,20 @@
                 </a:solidFill>
                 <a:latin typeface="Arimo"/>
               </a:rPr>
-              <a:t>Стимулирует синтез коллагена и ингибирует матриксные металлопротеиназы.</a:t>
-            </a:r>
-          </a:p>
-        </p:txBody>
-      </p:sp>
-      <p:sp>
-        <p:nvSpPr>
-          <p:cNvPr id="12" name="Rounded Rectangle 11"/>
+              <a:t>Улучшает гидратацию и эластичность кожи, требует одного метаболического шага.</a:t>
+            </a:r>
+          </a:p>
+        </p:txBody>
+      </p:sp>
+      <p:sp>
+        <p:nvSpPr>
+          <p:cNvPr id="13" name="Rounded Rectangle 12"/>
           <p:cNvSpPr/>
           <p:nvPr/>
         </p:nvSpPr>
         <p:spPr>
           <a:xfrm>
-            <a:off x="6161484" y="1339453"/>
+            <a:off x="3259335" y="1339453"/>
             <a:ext cx="2624328" cy="2834640"/>
           </a:xfrm>
           <a:prstGeom prst="roundRect">
@@ -6519,13 +7398,13 @@
       </p:sp>
       <p:sp>
         <p:nvSpPr>
-          <p:cNvPr id="13" name="TextBox 12"/>
+          <p:cNvPr id="14" name="TextBox 13"/>
           <p:cNvSpPr txBox="1"/>
           <p:nvPr/>
         </p:nvSpPr>
         <p:spPr>
           <a:xfrm>
-            <a:off x="6344364" y="1518046"/>
+            <a:off x="3442215" y="1518046"/>
             <a:ext cx="2258568" cy="457200"/>
           </a:xfrm>
           <a:prstGeom prst="rect">
@@ -6557,6 +7436,141 @@
                 </a:solidFill>
                 <a:latin typeface="Arimo"/>
               </a:rPr>
+              <a:t>Ретинол</a:t>
+            </a:r>
+          </a:p>
+        </p:txBody>
+      </p:sp>
+      <p:sp>
+        <p:nvSpPr>
+          <p:cNvPr id="15" name="TextBox 14"/>
+          <p:cNvSpPr txBox="1"/>
+          <p:nvPr/>
+        </p:nvSpPr>
+        <p:spPr>
+          <a:xfrm>
+            <a:off x="3442215" y="2053828"/>
+            <a:ext cx="2258568" cy="1920240"/>
+          </a:xfrm>
+          <a:prstGeom prst="rect">
+            <a:avLst/>
+          </a:prstGeom>
+          <a:noFill/>
+        </p:spPr>
+        <p:txBody>
+          <a:bodyPr wrap="square" tIns="0" bIns="0" lIns="0" rIns="0">
+            <a:spAutoFit/>
+          </a:bodyPr>
+          <a:lstStyle/>
+          <a:p>
+            <a:pPr algn="l">
+              <a:lnSpc>
+                <a:spcPct val="120000"/>
+              </a:lnSpc>
+              <a:defRPr sz="1300" b="0" i="0">
+                <a:solidFill>
+                  <a:srgbClr val="3D4A40"/>
+                </a:solidFill>
+                <a:latin typeface="Arimo"/>
+              </a:defRPr>
+            </a:pPr>
+            <a:r>
+              <a:rPr sz="1300" b="0" i="0">
+                <a:solidFill>
+                  <a:srgbClr val="3D4A40"/>
+                </a:solidFill>
+                <a:latin typeface="Arimo"/>
+              </a:rPr>
+              <a:t>Стимулирует синтез коллагена и ингибирует матриксные металлопротеиназы.</a:t>
+            </a:r>
+          </a:p>
+        </p:txBody>
+      </p:sp>
+      <p:sp>
+        <p:nvSpPr>
+          <p:cNvPr id="16" name="Rounded Rectangle 15"/>
+          <p:cNvSpPr/>
+          <p:nvPr/>
+        </p:nvSpPr>
+        <p:spPr>
+          <a:xfrm>
+            <a:off x="6161484" y="1339453"/>
+            <a:ext cx="2624328" cy="2834640"/>
+          </a:xfrm>
+          <a:prstGeom prst="roundRect">
+            <a:avLst/>
+          </a:prstGeom>
+          <a:solidFill>
+            <a:srgbClr val="E6D2CA"/>
+          </a:solidFill>
+          <a:ln w="12700">
+            <a:solidFill>
+              <a:srgbClr val="D7E0CE"/>
+            </a:solidFill>
+          </a:ln>
+        </p:spPr>
+        <p:style>
+          <a:lnRef idx="1">
+            <a:schemeClr val="accent1"/>
+          </a:lnRef>
+          <a:fillRef idx="3">
+            <a:schemeClr val="accent1"/>
+          </a:fillRef>
+          <a:effectRef idx="2">
+            <a:schemeClr val="accent1"/>
+          </a:effectRef>
+          <a:fontRef idx="minor">
+            <a:schemeClr val="lt1"/>
+          </a:fontRef>
+        </p:style>
+        <p:txBody>
+          <a:bodyPr rtlCol="0" anchor="ctr"/>
+          <a:lstStyle/>
+          <a:p>
+            <a:pPr algn="ctr"/>
+          </a:p>
+        </p:txBody>
+      </p:sp>
+      <p:sp>
+        <p:nvSpPr>
+          <p:cNvPr id="17" name="TextBox 16"/>
+          <p:cNvSpPr txBox="1"/>
+          <p:nvPr/>
+        </p:nvSpPr>
+        <p:spPr>
+          <a:xfrm>
+            <a:off x="6344364" y="1518046"/>
+            <a:ext cx="2258568" cy="457200"/>
+          </a:xfrm>
+          <a:prstGeom prst="rect">
+            <a:avLst/>
+          </a:prstGeom>
+          <a:noFill/>
+        </p:spPr>
+        <p:txBody>
+          <a:bodyPr wrap="square" tIns="0" bIns="0" lIns="0" rIns="0">
+            <a:spAutoFit/>
+          </a:bodyPr>
+          <a:lstStyle/>
+          <a:p>
+            <a:pPr algn="l">
+              <a:lnSpc>
+                <a:spcPct val="120000"/>
+              </a:lnSpc>
+              <a:defRPr sz="1800" b="1" i="0">
+                <a:solidFill>
+                  <a:srgbClr val="2C3440"/>
+                </a:solidFill>
+                <a:latin typeface="Arimo"/>
+              </a:defRPr>
+            </a:pPr>
+            <a:r>
+              <a:rPr sz="1800" b="1" i="0">
+                <a:solidFill>
+                  <a:srgbClr val="2C3440"/>
+                </a:solidFill>
+                <a:latin typeface="Arimo"/>
+              </a:rPr>
               <a:t>Ретилпальмитат</a:t>
             </a:r>
           </a:p>
@@ -6564,7 +7578,7 @@
       </p:sp>
       <p:sp>
         <p:nvSpPr>
-          <p:cNvPr id="14" name="TextBox 13"/>
+          <p:cNvPr id="18" name="TextBox 17"/>
           <p:cNvSpPr txBox="1"/>
           <p:nvPr/>
         </p:nvSpPr>
@@ -6641,7 +7655,7 @@
         </p:nvSpPr>
         <p:spPr>
           <a:xfrm>
-            <a:off x="357187" y="4643437"/>
+            <a:off x="357187" y="4464843"/>
             <a:ext cx="4572000" cy="274320"/>
           </a:xfrm>
           <a:prstGeom prst="rect">
@@ -6686,7 +7700,7 @@
         </p:nvSpPr>
         <p:spPr>
           <a:xfrm>
-            <a:off x="5029200" y="4643437"/>
+            <a:off x="5029200" y="4464843"/>
             <a:ext cx="3749039" cy="274320"/>
           </a:xfrm>
           <a:prstGeom prst="rect">
@@ -6725,115 +7739,23 @@
       </p:sp>
       <p:sp>
         <p:nvSpPr>
-          <p:cNvPr id="4" name="TextBox 3"/>
-          <p:cNvSpPr txBox="1"/>
-          <p:nvPr/>
-        </p:nvSpPr>
-        <p:spPr>
-          <a:xfrm>
-            <a:off x="357187" y="357187"/>
-            <a:ext cx="8429625" cy="401835"/>
-          </a:xfrm>
-          <a:prstGeom prst="rect">
-            <a:avLst/>
-          </a:prstGeom>
-          <a:noFill/>
-        </p:spPr>
-        <p:txBody>
-          <a:bodyPr wrap="square" tIns="0" bIns="0" lIns="0" rIns="0">
-            <a:spAutoFit/>
-          </a:bodyPr>
-          <a:lstStyle/>
-          <a:p>
-            <a:pPr algn="l">
-              <a:lnSpc>
-                <a:spcPct val="120000"/>
-              </a:lnSpc>
-              <a:defRPr sz="2600" b="1" i="0">
-                <a:solidFill>
-                  <a:srgbClr val="2C3440"/>
-                </a:solidFill>
-                <a:latin typeface="Arimo"/>
-              </a:defRPr>
-            </a:pPr>
-            <a:r>
-              <a:rPr sz="2600" b="1" i="0">
-                <a:solidFill>
-                  <a:srgbClr val="2C3440"/>
-                </a:solidFill>
-                <a:latin typeface="Arimo"/>
-              </a:rPr>
-              <a:t>Клинические Метрики</a:t>
-            </a:r>
-          </a:p>
-        </p:txBody>
-      </p:sp>
-      <p:sp>
-        <p:nvSpPr>
-          <p:cNvPr id="5" name="TextBox 4"/>
-          <p:cNvSpPr txBox="1"/>
-          <p:nvPr/>
-        </p:nvSpPr>
-        <p:spPr>
-          <a:xfrm>
-            <a:off x="357187" y="803671"/>
-            <a:ext cx="8429625" cy="267890"/>
-          </a:xfrm>
-          <a:prstGeom prst="rect">
-            <a:avLst/>
-          </a:prstGeom>
-          <a:noFill/>
-        </p:spPr>
-        <p:txBody>
-          <a:bodyPr wrap="square" tIns="0" bIns="0" lIns="0" rIns="0">
-            <a:spAutoFit/>
-          </a:bodyPr>
-          <a:lstStyle/>
-          <a:p>
-            <a:pPr algn="l">
-              <a:lnSpc>
-                <a:spcPct val="120000"/>
-              </a:lnSpc>
-              <a:defRPr sz="1500" b="0" i="0">
-                <a:solidFill>
-                  <a:srgbClr val="6D8470"/>
-                </a:solidFill>
-                <a:latin typeface="Arimo"/>
-              </a:defRPr>
-            </a:pPr>
-            <a:r>
-              <a:rPr sz="1500" b="0" i="0">
-                <a:solidFill>
-                  <a:srgbClr val="6D8470"/>
-                </a:solidFill>
-                <a:latin typeface="Arimo"/>
-              </a:rPr>
-              <a:t>Параметры эффективности ретиноидов третьего поколения</a:t>
-            </a:r>
-          </a:p>
-        </p:txBody>
-      </p:sp>
-      <p:sp>
-        <p:nvSpPr>
-          <p:cNvPr id="6" name="Rounded Rectangle 5"/>
+          <p:cNvPr id="4" name="Rectangle 3"/>
           <p:cNvSpPr/>
           <p:nvPr/>
         </p:nvSpPr>
         <p:spPr>
           <a:xfrm>
-            <a:off x="357187" y="1339453"/>
-            <a:ext cx="2624328" cy="2834640"/>
-          </a:xfrm>
-          <a:prstGeom prst="roundRect">
+            <a:off x="357187" y="4732734"/>
+            <a:ext cx="8429625" cy="8929"/>
+          </a:xfrm>
+          <a:prstGeom prst="rect">
             <a:avLst/>
           </a:prstGeom>
           <a:solidFill>
-            <a:srgbClr val="E6D2CA"/>
+            <a:srgbClr val="D7E0CE"/>
           </a:solidFill>
-          <a:ln w="12700">
-            <a:solidFill>
-              <a:srgbClr val="D7E0CE"/>
-            </a:solidFill>
+          <a:ln>
+            <a:noFill/>
           </a:ln>
         </p:spPr>
         <p:style>
@@ -6858,16 +7780,40 @@
           </a:p>
         </p:txBody>
       </p:sp>
-      <p:sp>
-        <p:nvSpPr>
-          <p:cNvPr id="7" name="TextBox 6"/>
+      <p:pic>
+        <p:nvPicPr>
+          <p:cNvPr id="5" name="Picture 4" descr="mark_6D8470.png"/>
+          <p:cNvPicPr>
+            <a:picLocks noChangeAspect="1"/>
+          </p:cNvPicPr>
+          <p:nvPr/>
+        </p:nvPicPr>
+        <p:blipFill>
+          <a:blip r:embed="rId2"/>
+          <a:stretch>
+            <a:fillRect/>
+          </a:stretch>
+        </p:blipFill>
+        <p:spPr>
+          <a:xfrm>
+            <a:off x="357187" y="4848820"/>
+            <a:ext cx="178593" cy="178593"/>
+          </a:xfrm>
+          <a:prstGeom prst="rect">
+            <a:avLst/>
+          </a:prstGeom>
+        </p:spPr>
+      </p:pic>
+      <p:sp>
+        <p:nvSpPr>
+          <p:cNvPr id="6" name="TextBox 5"/>
           <p:cNvSpPr txBox="1"/>
           <p:nvPr/>
         </p:nvSpPr>
         <p:spPr>
           <a:xfrm>
-            <a:off x="540067" y="1473398"/>
-            <a:ext cx="2258568" cy="731520"/>
+            <a:off x="607218" y="4830960"/>
+            <a:ext cx="1785937" cy="178593"/>
           </a:xfrm>
           <a:prstGeom prst="rect">
             <a:avLst/>
@@ -6884,35 +7830,35 @@
               <a:lnSpc>
                 <a:spcPct val="120000"/>
               </a:lnSpc>
-              <a:defRPr sz="5200" b="1" i="0">
-                <a:solidFill>
-                  <a:srgbClr val="6D8470"/>
-                </a:solidFill>
-                <a:latin typeface="Arimo"/>
-              </a:defRPr>
-            </a:pPr>
-            <a:r>
-              <a:rPr sz="5200" b="1" i="0">
-                <a:solidFill>
-                  <a:srgbClr val="6D8470"/>
-                </a:solidFill>
-                <a:latin typeface="Arimo"/>
-              </a:rPr>
-              <a:t>0.1%</a:t>
-            </a:r>
-          </a:p>
-        </p:txBody>
-      </p:sp>
-      <p:sp>
-        <p:nvSpPr>
-          <p:cNvPr id="8" name="TextBox 7"/>
+              <a:defRPr sz="1100" b="1" i="0">
+                <a:solidFill>
+                  <a:srgbClr val="3D4A40"/>
+                </a:solidFill>
+                <a:latin typeface="Arimo"/>
+              </a:defRPr>
+            </a:pPr>
+            <a:r>
+              <a:rPr sz="1100" b="1" i="0">
+                <a:solidFill>
+                  <a:srgbClr val="3D4A40"/>
+                </a:solidFill>
+                <a:latin typeface="Arimo"/>
+              </a:rPr>
+              <a:t>YM PROSKIN</a:t>
+            </a:r>
+          </a:p>
+        </p:txBody>
+      </p:sp>
+      <p:sp>
+        <p:nvSpPr>
+          <p:cNvPr id="7" name="TextBox 6"/>
           <p:cNvSpPr txBox="1"/>
           <p:nvPr/>
         </p:nvSpPr>
         <p:spPr>
           <a:xfrm>
-            <a:off x="540067" y="2232421"/>
-            <a:ext cx="2258568" cy="365760"/>
+            <a:off x="8251031" y="4830960"/>
+            <a:ext cx="535781" cy="178593"/>
           </a:xfrm>
           <a:prstGeom prst="rect">
             <a:avLst/>
@@ -6925,39 +7871,39 @@
           </a:bodyPr>
           <a:lstStyle/>
           <a:p>
-            <a:pPr algn="l">
-              <a:lnSpc>
-                <a:spcPct val="120000"/>
-              </a:lnSpc>
-              <a:defRPr sz="1800" b="1" i="0">
-                <a:solidFill>
-                  <a:srgbClr val="2C3440"/>
-                </a:solidFill>
-                <a:latin typeface="Arimo"/>
-              </a:defRPr>
-            </a:pPr>
-            <a:r>
-              <a:rPr sz="1800" b="1" i="0">
-                <a:solidFill>
-                  <a:srgbClr val="2C3440"/>
-                </a:solidFill>
-                <a:latin typeface="Arimo"/>
-              </a:rPr>
-              <a:t>Тазаротен</a:t>
-            </a:r>
-          </a:p>
-        </p:txBody>
-      </p:sp>
-      <p:sp>
-        <p:nvSpPr>
-          <p:cNvPr id="9" name="TextBox 8"/>
+            <a:pPr algn="r">
+              <a:lnSpc>
+                <a:spcPct val="120000"/>
+              </a:lnSpc>
+              <a:defRPr sz="1100" b="0" i="0">
+                <a:solidFill>
+                  <a:srgbClr val="6D8470"/>
+                </a:solidFill>
+                <a:latin typeface="Arimo"/>
+              </a:defRPr>
+            </a:pPr>
+            <a:r>
+              <a:rPr sz="1100" b="0" i="0">
+                <a:solidFill>
+                  <a:srgbClr val="6D8470"/>
+                </a:solidFill>
+                <a:latin typeface="Arimo"/>
+              </a:rPr>
+              <a:t>8</a:t>
+            </a:r>
+          </a:p>
+        </p:txBody>
+      </p:sp>
+      <p:sp>
+        <p:nvSpPr>
+          <p:cNvPr id="8" name="TextBox 7"/>
           <p:cNvSpPr txBox="1"/>
           <p:nvPr/>
         </p:nvSpPr>
         <p:spPr>
           <a:xfrm>
-            <a:off x="540067" y="2634257"/>
-            <a:ext cx="2258568" cy="1280160"/>
+            <a:off x="357187" y="357187"/>
+            <a:ext cx="8429625" cy="401835"/>
           </a:xfrm>
           <a:prstGeom prst="rect">
             <a:avLst/>
@@ -6974,21 +7920,66 @@
               <a:lnSpc>
                 <a:spcPct val="120000"/>
               </a:lnSpc>
-              <a:defRPr sz="1200" b="0" i="0">
-                <a:solidFill>
-                  <a:srgbClr val="3D4A40"/>
-                </a:solidFill>
-                <a:latin typeface="Arimo"/>
-              </a:defRPr>
-            </a:pPr>
-            <a:r>
-              <a:rPr sz="1200" b="0" i="0">
-                <a:solidFill>
-                  <a:srgbClr val="3D4A40"/>
-                </a:solidFill>
-                <a:latin typeface="Arimo"/>
-              </a:rPr>
-              <a:t>Концентрация крема, доказавшая эффективность при глубоких морщинах.</a:t>
+              <a:defRPr sz="2600" b="1" i="0">
+                <a:solidFill>
+                  <a:srgbClr val="2C3440"/>
+                </a:solidFill>
+                <a:latin typeface="Arimo"/>
+              </a:defRPr>
+            </a:pPr>
+            <a:r>
+              <a:rPr sz="2600" b="1" i="0">
+                <a:solidFill>
+                  <a:srgbClr val="2C3440"/>
+                </a:solidFill>
+                <a:latin typeface="Arimo"/>
+              </a:rPr>
+              <a:t>Клинические Метрики</a:t>
+            </a:r>
+          </a:p>
+        </p:txBody>
+      </p:sp>
+      <p:sp>
+        <p:nvSpPr>
+          <p:cNvPr id="9" name="TextBox 8"/>
+          <p:cNvSpPr txBox="1"/>
+          <p:nvPr/>
+        </p:nvSpPr>
+        <p:spPr>
+          <a:xfrm>
+            <a:off x="357187" y="803671"/>
+            <a:ext cx="8429625" cy="267890"/>
+          </a:xfrm>
+          <a:prstGeom prst="rect">
+            <a:avLst/>
+          </a:prstGeom>
+          <a:noFill/>
+        </p:spPr>
+        <p:txBody>
+          <a:bodyPr wrap="square" tIns="0" bIns="0" lIns="0" rIns="0">
+            <a:spAutoFit/>
+          </a:bodyPr>
+          <a:lstStyle/>
+          <a:p>
+            <a:pPr algn="l">
+              <a:lnSpc>
+                <a:spcPct val="120000"/>
+              </a:lnSpc>
+              <a:defRPr sz="1500" b="0" i="0">
+                <a:solidFill>
+                  <a:srgbClr val="6D8470"/>
+                </a:solidFill>
+                <a:latin typeface="Arimo"/>
+              </a:defRPr>
+            </a:pPr>
+            <a:r>
+              <a:rPr sz="1500" b="0" i="0">
+                <a:solidFill>
+                  <a:srgbClr val="6D8470"/>
+                </a:solidFill>
+                <a:latin typeface="Arimo"/>
+              </a:rPr>
+              <a:t>Параметры эффективности ретиноидов третьего поколения</a:t>
             </a:r>
           </a:p>
         </p:txBody>
@@ -7001,7 +7992,7 @@
         </p:nvSpPr>
         <p:spPr>
           <a:xfrm>
-            <a:off x="3259335" y="1339453"/>
+            <a:off x="357187" y="1339453"/>
             <a:ext cx="2624328" cy="2834640"/>
           </a:xfrm>
           <a:prstGeom prst="roundRect">
@@ -7046,7 +8037,7 @@
         </p:nvSpPr>
         <p:spPr>
           <a:xfrm>
-            <a:off x="3442215" y="1473398"/>
+            <a:off x="540067" y="1473398"/>
             <a:ext cx="2258568" cy="731520"/>
           </a:xfrm>
           <a:prstGeom prst="rect">
@@ -7078,7 +8069,7 @@
                 </a:solidFill>
                 <a:latin typeface="Arimo"/>
               </a:rPr>
-              <a:t>1 шаг</a:t>
+              <a:t>0.1%</a:t>
             </a:r>
           </a:p>
         </p:txBody>
@@ -7091,7 +8082,7 @@
         </p:nvSpPr>
         <p:spPr>
           <a:xfrm>
-            <a:off x="3442215" y="2232421"/>
+            <a:off x="540067" y="2232421"/>
             <a:ext cx="2258568" cy="365760"/>
           </a:xfrm>
           <a:prstGeom prst="rect">
@@ -7123,7 +8114,7 @@
                 </a:solidFill>
                 <a:latin typeface="Arimo"/>
               </a:rPr>
-              <a:t>Ретинальдегид</a:t>
+              <a:t>Тазаротен</a:t>
             </a:r>
           </a:p>
         </p:txBody>
@@ -7136,7 +8127,7 @@
         </p:nvSpPr>
         <p:spPr>
           <a:xfrm>
-            <a:off x="3442215" y="2634257"/>
+            <a:off x="540067" y="2634257"/>
             <a:ext cx="2258568" cy="1280160"/>
           </a:xfrm>
           <a:prstGeom prst="rect">
@@ -7168,7 +8159,7 @@
                 </a:solidFill>
                 <a:latin typeface="Arimo"/>
               </a:rPr>
-              <a:t>Конверсия до активной кислоты, минимизирует раздражения.</a:t>
+              <a:t>Концентрация крема, доказавшая эффективность при глубоких морщинах.</a:t>
             </a:r>
           </a:p>
         </p:txBody>
@@ -7181,7 +8172,7 @@
         </p:nvSpPr>
         <p:spPr>
           <a:xfrm>
-            <a:off x="6161484" y="1339453"/>
+            <a:off x="3259335" y="1339453"/>
             <a:ext cx="2624328" cy="2834640"/>
           </a:xfrm>
           <a:prstGeom prst="roundRect">
@@ -7226,7 +8217,7 @@
         </p:nvSpPr>
         <p:spPr>
           <a:xfrm>
-            <a:off x="6344364" y="1473398"/>
+            <a:off x="3442215" y="1473398"/>
             <a:ext cx="2258568" cy="731520"/>
           </a:xfrm>
           <a:prstGeom prst="rect">
@@ -7258,7 +8249,7 @@
                 </a:solidFill>
                 <a:latin typeface="Arimo"/>
               </a:rPr>
-              <a:t>12 фкт</a:t>
+              <a:t>1 шаг</a:t>
             </a:r>
           </a:p>
         </p:txBody>
@@ -7271,7 +8262,7 @@
         </p:nvSpPr>
         <p:spPr>
           <a:xfrm>
-            <a:off x="6344364" y="2232421"/>
+            <a:off x="3442215" y="2232421"/>
             <a:ext cx="2258568" cy="365760"/>
           </a:xfrm>
           <a:prstGeom prst="rect">
@@ -7303,6 +8294,186 @@
                 </a:solidFill>
                 <a:latin typeface="Arimo"/>
               </a:rPr>
+              <a:t>Ретинальдегид</a:t>
+            </a:r>
+          </a:p>
+        </p:txBody>
+      </p:sp>
+      <p:sp>
+        <p:nvSpPr>
+          <p:cNvPr id="17" name="TextBox 16"/>
+          <p:cNvSpPr txBox="1"/>
+          <p:nvPr/>
+        </p:nvSpPr>
+        <p:spPr>
+          <a:xfrm>
+            <a:off x="3442215" y="2634257"/>
+            <a:ext cx="2258568" cy="1280160"/>
+          </a:xfrm>
+          <a:prstGeom prst="rect">
+            <a:avLst/>
+          </a:prstGeom>
+          <a:noFill/>
+        </p:spPr>
+        <p:txBody>
+          <a:bodyPr wrap="square" tIns="0" bIns="0" lIns="0" rIns="0">
+            <a:spAutoFit/>
+          </a:bodyPr>
+          <a:lstStyle/>
+          <a:p>
+            <a:pPr algn="l">
+              <a:lnSpc>
+                <a:spcPct val="120000"/>
+              </a:lnSpc>
+              <a:defRPr sz="1200" b="0" i="0">
+                <a:solidFill>
+                  <a:srgbClr val="3D4A40"/>
+                </a:solidFill>
+                <a:latin typeface="Arimo"/>
+              </a:defRPr>
+            </a:pPr>
+            <a:r>
+              <a:rPr sz="1200" b="0" i="0">
+                <a:solidFill>
+                  <a:srgbClr val="3D4A40"/>
+                </a:solidFill>
+                <a:latin typeface="Arimo"/>
+              </a:rPr>
+              <a:t>Конверсия до активной кислоты, минимизирует раздражения.</a:t>
+            </a:r>
+          </a:p>
+        </p:txBody>
+      </p:sp>
+      <p:sp>
+        <p:nvSpPr>
+          <p:cNvPr id="18" name="Rounded Rectangle 17"/>
+          <p:cNvSpPr/>
+          <p:nvPr/>
+        </p:nvSpPr>
+        <p:spPr>
+          <a:xfrm>
+            <a:off x="6161484" y="1339453"/>
+            <a:ext cx="2624328" cy="2834640"/>
+          </a:xfrm>
+          <a:prstGeom prst="roundRect">
+            <a:avLst/>
+          </a:prstGeom>
+          <a:solidFill>
+            <a:srgbClr val="E6D2CA"/>
+          </a:solidFill>
+          <a:ln w="12700">
+            <a:solidFill>
+              <a:srgbClr val="D7E0CE"/>
+            </a:solidFill>
+          </a:ln>
+        </p:spPr>
+        <p:style>
+          <a:lnRef idx="1">
+            <a:schemeClr val="accent1"/>
+          </a:lnRef>
+          <a:fillRef idx="3">
+            <a:schemeClr val="accent1"/>
+          </a:fillRef>
+          <a:effectRef idx="2">
+            <a:schemeClr val="accent1"/>
+          </a:effectRef>
+          <a:fontRef idx="minor">
+            <a:schemeClr val="lt1"/>
+          </a:fontRef>
+        </p:style>
+        <p:txBody>
+          <a:bodyPr rtlCol="0" anchor="ctr"/>
+          <a:lstStyle/>
+          <a:p>
+            <a:pPr algn="ctr"/>
+          </a:p>
+        </p:txBody>
+      </p:sp>
+      <p:sp>
+        <p:nvSpPr>
+          <p:cNvPr id="19" name="TextBox 18"/>
+          <p:cNvSpPr txBox="1"/>
+          <p:nvPr/>
+        </p:nvSpPr>
+        <p:spPr>
+          <a:xfrm>
+            <a:off x="6344364" y="1473398"/>
+            <a:ext cx="2258568" cy="731520"/>
+          </a:xfrm>
+          <a:prstGeom prst="rect">
+            <a:avLst/>
+          </a:prstGeom>
+          <a:noFill/>
+        </p:spPr>
+        <p:txBody>
+          <a:bodyPr wrap="square" tIns="0" bIns="0" lIns="0" rIns="0">
+            <a:spAutoFit/>
+          </a:bodyPr>
+          <a:lstStyle/>
+          <a:p>
+            <a:pPr algn="l">
+              <a:lnSpc>
+                <a:spcPct val="120000"/>
+              </a:lnSpc>
+              <a:defRPr sz="5200" b="1" i="0">
+                <a:solidFill>
+                  <a:srgbClr val="6D8470"/>
+                </a:solidFill>
+                <a:latin typeface="Arimo"/>
+              </a:defRPr>
+            </a:pPr>
+            <a:r>
+              <a:rPr sz="5200" b="1" i="0">
+                <a:solidFill>
+                  <a:srgbClr val="6D8470"/>
+                </a:solidFill>
+                <a:latin typeface="Arimo"/>
+              </a:rPr>
+              <a:t>12 фкт</a:t>
+            </a:r>
+          </a:p>
+        </p:txBody>
+      </p:sp>
+      <p:sp>
+        <p:nvSpPr>
+          <p:cNvPr id="20" name="TextBox 19"/>
+          <p:cNvSpPr txBox="1"/>
+          <p:nvPr/>
+        </p:nvSpPr>
+        <p:spPr>
+          <a:xfrm>
+            <a:off x="6344364" y="2232421"/>
+            <a:ext cx="2258568" cy="365760"/>
+          </a:xfrm>
+          <a:prstGeom prst="rect">
+            <a:avLst/>
+          </a:prstGeom>
+          <a:noFill/>
+        </p:spPr>
+        <p:txBody>
+          <a:bodyPr wrap="square" tIns="0" bIns="0" lIns="0" rIns="0">
+            <a:spAutoFit/>
+          </a:bodyPr>
+          <a:lstStyle/>
+          <a:p>
+            <a:pPr algn="l">
+              <a:lnSpc>
+                <a:spcPct val="120000"/>
+              </a:lnSpc>
+              <a:defRPr sz="1800" b="1" i="0">
+                <a:solidFill>
+                  <a:srgbClr val="2C3440"/>
+                </a:solidFill>
+                <a:latin typeface="Arimo"/>
+              </a:defRPr>
+            </a:pPr>
+            <a:r>
+              <a:rPr sz="1800" b="1" i="0">
+                <a:solidFill>
+                  <a:srgbClr val="2C3440"/>
+                </a:solidFill>
+                <a:latin typeface="Arimo"/>
+              </a:rPr>
               <a:t>Проверенная база</a:t>
             </a:r>
           </a:p>
@@ -7310,7 +8481,7 @@
       </p:sp>
       <p:sp>
         <p:nvSpPr>
-          <p:cNvPr id="17" name="TextBox 16"/>
+          <p:cNvPr id="21" name="TextBox 20"/>
           <p:cNvSpPr txBox="1"/>
           <p:nvPr/>
         </p:nvSpPr>
@@ -7387,7 +8558,7 @@
         </p:nvSpPr>
         <p:spPr>
           <a:xfrm>
-            <a:off x="357187" y="4643437"/>
+            <a:off x="357187" y="4464843"/>
             <a:ext cx="4572000" cy="274320"/>
           </a:xfrm>
           <a:prstGeom prst="rect">
@@ -7432,7 +8603,7 @@
         </p:nvSpPr>
         <p:spPr>
           <a:xfrm>
-            <a:off x="5029200" y="4643437"/>
+            <a:off x="5029200" y="4464843"/>
             <a:ext cx="3749039" cy="274320"/>
           </a:xfrm>
           <a:prstGeom prst="rect">
@@ -7471,115 +8642,23 @@
       </p:sp>
       <p:sp>
         <p:nvSpPr>
-          <p:cNvPr id="4" name="TextBox 3"/>
-          <p:cNvSpPr txBox="1"/>
-          <p:nvPr/>
-        </p:nvSpPr>
-        <p:spPr>
-          <a:xfrm>
-            <a:off x="357187" y="357187"/>
-            <a:ext cx="8429625" cy="401835"/>
-          </a:xfrm>
-          <a:prstGeom prst="rect">
-            <a:avLst/>
-          </a:prstGeom>
-          <a:noFill/>
-        </p:spPr>
-        <p:txBody>
-          <a:bodyPr wrap="square" tIns="0" bIns="0" lIns="0" rIns="0">
-            <a:spAutoFit/>
-          </a:bodyPr>
-          <a:lstStyle/>
-          <a:p>
-            <a:pPr algn="l">
-              <a:lnSpc>
-                <a:spcPct val="120000"/>
-              </a:lnSpc>
-              <a:defRPr sz="2600" b="1" i="0">
-                <a:solidFill>
-                  <a:srgbClr val="2C3440"/>
-                </a:solidFill>
-                <a:latin typeface="Arimo"/>
-              </a:defRPr>
-            </a:pPr>
-            <a:r>
-              <a:rPr sz="2600" b="1" i="0">
-                <a:solidFill>
-                  <a:srgbClr val="2C3440"/>
-                </a:solidFill>
-                <a:latin typeface="Arimo"/>
-              </a:rPr>
-              <a:t>Противопоказания и Ограничения</a:t>
-            </a:r>
-          </a:p>
-        </p:txBody>
-      </p:sp>
-      <p:sp>
-        <p:nvSpPr>
-          <p:cNvPr id="5" name="TextBox 4"/>
-          <p:cNvSpPr txBox="1"/>
-          <p:nvPr/>
-        </p:nvSpPr>
-        <p:spPr>
-          <a:xfrm>
-            <a:off x="357187" y="803671"/>
-            <a:ext cx="8429625" cy="267890"/>
-          </a:xfrm>
-          <a:prstGeom prst="rect">
-            <a:avLst/>
-          </a:prstGeom>
-          <a:noFill/>
-        </p:spPr>
-        <p:txBody>
-          <a:bodyPr wrap="square" tIns="0" bIns="0" lIns="0" rIns="0">
-            <a:spAutoFit/>
-          </a:bodyPr>
-          <a:lstStyle/>
-          <a:p>
-            <a:pPr algn="l">
-              <a:lnSpc>
-                <a:spcPct val="120000"/>
-              </a:lnSpc>
-              <a:defRPr sz="1500" b="0" i="0">
-                <a:solidFill>
-                  <a:srgbClr val="6D8470"/>
-                </a:solidFill>
-                <a:latin typeface="Arimo"/>
-              </a:defRPr>
-            </a:pPr>
-            <a:r>
-              <a:rPr sz="1500" b="0" i="0">
-                <a:solidFill>
-                  <a:srgbClr val="6D8470"/>
-                </a:solidFill>
-                <a:latin typeface="Arimo"/>
-              </a:rPr>
-              <a:t>Меры предосторожности в клинической практике</a:t>
-            </a:r>
-          </a:p>
-        </p:txBody>
-      </p:sp>
-      <p:sp>
-        <p:nvSpPr>
-          <p:cNvPr id="6" name="Rounded Rectangle 5"/>
+          <p:cNvPr id="4" name="Rectangle 3"/>
           <p:cNvSpPr/>
           <p:nvPr/>
         </p:nvSpPr>
         <p:spPr>
           <a:xfrm>
-            <a:off x="357187" y="1339453"/>
-            <a:ext cx="8430768" cy="2496312"/>
-          </a:xfrm>
-          <a:prstGeom prst="roundRect">
+            <a:off x="357187" y="4732734"/>
+            <a:ext cx="8429625" cy="8929"/>
+          </a:xfrm>
+          <a:prstGeom prst="rect">
             <a:avLst/>
           </a:prstGeom>
           <a:solidFill>
-            <a:srgbClr val="E6D2CA"/>
+            <a:srgbClr val="D7E0CE"/>
           </a:solidFill>
-          <a:ln w="25400">
-            <a:solidFill>
-              <a:srgbClr val="9E6A5A"/>
-            </a:solidFill>
+          <a:ln>
+            <a:noFill/>
           </a:ln>
         </p:spPr>
         <p:style>
@@ -7604,16 +8683,40 @@
           </a:p>
         </p:txBody>
       </p:sp>
-      <p:sp>
-        <p:nvSpPr>
-          <p:cNvPr id="7" name="TextBox 6"/>
+      <p:pic>
+        <p:nvPicPr>
+          <p:cNvPr id="5" name="Picture 4" descr="mark_6D8470.png"/>
+          <p:cNvPicPr>
+            <a:picLocks noChangeAspect="1"/>
+          </p:cNvPicPr>
+          <p:nvPr/>
+        </p:nvPicPr>
+        <p:blipFill>
+          <a:blip r:embed="rId2"/>
+          <a:stretch>
+            <a:fillRect/>
+          </a:stretch>
+        </p:blipFill>
+        <p:spPr>
+          <a:xfrm>
+            <a:off x="357187" y="4848820"/>
+            <a:ext cx="178593" cy="178593"/>
+          </a:xfrm>
+          <a:prstGeom prst="rect">
+            <a:avLst/>
+          </a:prstGeom>
+        </p:spPr>
+      </p:pic>
+      <p:sp>
+        <p:nvSpPr>
+          <p:cNvPr id="6" name="TextBox 5"/>
           <p:cNvSpPr txBox="1"/>
           <p:nvPr/>
         </p:nvSpPr>
         <p:spPr>
           <a:xfrm>
-            <a:off x="640080" y="2009179"/>
-            <a:ext cx="731520" cy="731520"/>
+            <a:off x="607218" y="4830960"/>
+            <a:ext cx="1785937" cy="178593"/>
           </a:xfrm>
           <a:prstGeom prst="rect">
             <a:avLst/>
@@ -7626,39 +8729,39 @@
           </a:bodyPr>
           <a:lstStyle/>
           <a:p>
-            <a:pPr algn="ctr">
-              <a:lnSpc>
-                <a:spcPct val="120000"/>
-              </a:lnSpc>
-              <a:defRPr sz="4800" b="0" i="0">
-                <a:solidFill>
-                  <a:srgbClr val="9E6A5A"/>
-                </a:solidFill>
-                <a:latin typeface="Arimo"/>
-              </a:defRPr>
-            </a:pPr>
-            <a:r>
-              <a:rPr sz="4800" b="0" i="0">
-                <a:solidFill>
-                  <a:srgbClr val="9E6A5A"/>
-                </a:solidFill>
-                <a:latin typeface="Arimo"/>
-              </a:rPr>
-              <a:t>⚠️</a:t>
-            </a:r>
-          </a:p>
-        </p:txBody>
-      </p:sp>
-      <p:sp>
-        <p:nvSpPr>
-          <p:cNvPr id="8" name="TextBox 7"/>
+            <a:pPr algn="l">
+              <a:lnSpc>
+                <a:spcPct val="120000"/>
+              </a:lnSpc>
+              <a:defRPr sz="1100" b="1" i="0">
+                <a:solidFill>
+                  <a:srgbClr val="3D4A40"/>
+                </a:solidFill>
+                <a:latin typeface="Arimo"/>
+              </a:defRPr>
+            </a:pPr>
+            <a:r>
+              <a:rPr sz="1100" b="1" i="0">
+                <a:solidFill>
+                  <a:srgbClr val="3D4A40"/>
+                </a:solidFill>
+                <a:latin typeface="Arimo"/>
+              </a:rPr>
+              <a:t>YM PROSKIN</a:t>
+            </a:r>
+          </a:p>
+        </p:txBody>
+      </p:sp>
+      <p:sp>
+        <p:nvSpPr>
+          <p:cNvPr id="7" name="TextBox 6"/>
           <p:cNvSpPr txBox="1"/>
           <p:nvPr/>
         </p:nvSpPr>
         <p:spPr>
           <a:xfrm>
-            <a:off x="1517904" y="1607343"/>
-            <a:ext cx="6858000" cy="365760"/>
+            <a:off x="8251031" y="4830960"/>
+            <a:ext cx="535781" cy="178593"/>
           </a:xfrm>
           <a:prstGeom prst="rect">
             <a:avLst/>
@@ -7671,10 +8774,235 @@
           </a:bodyPr>
           <a:lstStyle/>
           <a:p>
+            <a:pPr algn="r">
+              <a:lnSpc>
+                <a:spcPct val="120000"/>
+              </a:lnSpc>
+              <a:defRPr sz="1100" b="0" i="0">
+                <a:solidFill>
+                  <a:srgbClr val="6D8470"/>
+                </a:solidFill>
+                <a:latin typeface="Arimo"/>
+              </a:defRPr>
+            </a:pPr>
+            <a:r>
+              <a:rPr sz="1100" b="0" i="0">
+                <a:solidFill>
+                  <a:srgbClr val="6D8470"/>
+                </a:solidFill>
+                <a:latin typeface="Arimo"/>
+              </a:rPr>
+              <a:t>9</a:t>
+            </a:r>
+          </a:p>
+        </p:txBody>
+      </p:sp>
+      <p:sp>
+        <p:nvSpPr>
+          <p:cNvPr id="8" name="TextBox 7"/>
+          <p:cNvSpPr txBox="1"/>
+          <p:nvPr/>
+        </p:nvSpPr>
+        <p:spPr>
+          <a:xfrm>
+            <a:off x="357187" y="357187"/>
+            <a:ext cx="8429625" cy="401835"/>
+          </a:xfrm>
+          <a:prstGeom prst="rect">
+            <a:avLst/>
+          </a:prstGeom>
+          <a:noFill/>
+        </p:spPr>
+        <p:txBody>
+          <a:bodyPr wrap="square" tIns="0" bIns="0" lIns="0" rIns="0">
+            <a:spAutoFit/>
+          </a:bodyPr>
+          <a:lstStyle/>
+          <a:p>
             <a:pPr algn="l">
               <a:lnSpc>
                 <a:spcPct val="120000"/>
               </a:lnSpc>
+              <a:defRPr sz="2600" b="1" i="0">
+                <a:solidFill>
+                  <a:srgbClr val="2C3440"/>
+                </a:solidFill>
+                <a:latin typeface="Arimo"/>
+              </a:defRPr>
+            </a:pPr>
+            <a:r>
+              <a:rPr sz="2600" b="1" i="0">
+                <a:solidFill>
+                  <a:srgbClr val="2C3440"/>
+                </a:solidFill>
+                <a:latin typeface="Arimo"/>
+              </a:rPr>
+              <a:t>Противопоказания и Ограничения</a:t>
+            </a:r>
+          </a:p>
+        </p:txBody>
+      </p:sp>
+      <p:sp>
+        <p:nvSpPr>
+          <p:cNvPr id="9" name="TextBox 8"/>
+          <p:cNvSpPr txBox="1"/>
+          <p:nvPr/>
+        </p:nvSpPr>
+        <p:spPr>
+          <a:xfrm>
+            <a:off x="357187" y="803671"/>
+            <a:ext cx="8429625" cy="267890"/>
+          </a:xfrm>
+          <a:prstGeom prst="rect">
+            <a:avLst/>
+          </a:prstGeom>
+          <a:noFill/>
+        </p:spPr>
+        <p:txBody>
+          <a:bodyPr wrap="square" tIns="0" bIns="0" lIns="0" rIns="0">
+            <a:spAutoFit/>
+          </a:bodyPr>
+          <a:lstStyle/>
+          <a:p>
+            <a:pPr algn="l">
+              <a:lnSpc>
+                <a:spcPct val="120000"/>
+              </a:lnSpc>
+              <a:defRPr sz="1500" b="0" i="0">
+                <a:solidFill>
+                  <a:srgbClr val="6D8470"/>
+                </a:solidFill>
+                <a:latin typeface="Arimo"/>
+              </a:defRPr>
+            </a:pPr>
+            <a:r>
+              <a:rPr sz="1500" b="0" i="0">
+                <a:solidFill>
+                  <a:srgbClr val="6D8470"/>
+                </a:solidFill>
+                <a:latin typeface="Arimo"/>
+              </a:rPr>
+              <a:t>Меры предосторожности в клинической практике</a:t>
+            </a:r>
+          </a:p>
+        </p:txBody>
+      </p:sp>
+      <p:sp>
+        <p:nvSpPr>
+          <p:cNvPr id="10" name="Rounded Rectangle 9"/>
+          <p:cNvSpPr/>
+          <p:nvPr/>
+        </p:nvSpPr>
+        <p:spPr>
+          <a:xfrm>
+            <a:off x="357187" y="1339453"/>
+            <a:ext cx="8430768" cy="2496312"/>
+          </a:xfrm>
+          <a:prstGeom prst="roundRect">
+            <a:avLst/>
+          </a:prstGeom>
+          <a:solidFill>
+            <a:srgbClr val="E6D2CA"/>
+          </a:solidFill>
+          <a:ln w="25400">
+            <a:solidFill>
+              <a:srgbClr val="9E6A5A"/>
+            </a:solidFill>
+          </a:ln>
+        </p:spPr>
+        <p:style>
+          <a:lnRef idx="1">
+            <a:schemeClr val="accent1"/>
+          </a:lnRef>
+          <a:fillRef idx="3">
+            <a:schemeClr val="accent1"/>
+          </a:fillRef>
+          <a:effectRef idx="2">
+            <a:schemeClr val="accent1"/>
+          </a:effectRef>
+          <a:fontRef idx="minor">
+            <a:schemeClr val="lt1"/>
+          </a:fontRef>
+        </p:style>
+        <p:txBody>
+          <a:bodyPr rtlCol="0" anchor="ctr"/>
+          <a:lstStyle/>
+          <a:p>
+            <a:pPr algn="ctr"/>
+          </a:p>
+        </p:txBody>
+      </p:sp>
+      <p:sp>
+        <p:nvSpPr>
+          <p:cNvPr id="11" name="TextBox 10"/>
+          <p:cNvSpPr txBox="1"/>
+          <p:nvPr/>
+        </p:nvSpPr>
+        <p:spPr>
+          <a:xfrm>
+            <a:off x="640080" y="2009179"/>
+            <a:ext cx="731520" cy="731520"/>
+          </a:xfrm>
+          <a:prstGeom prst="rect">
+            <a:avLst/>
+          </a:prstGeom>
+          <a:noFill/>
+        </p:spPr>
+        <p:txBody>
+          <a:bodyPr wrap="square" tIns="0" bIns="0" lIns="0" rIns="0">
+            <a:spAutoFit/>
+          </a:bodyPr>
+          <a:lstStyle/>
+          <a:p>
+            <a:pPr algn="ctr">
+              <a:lnSpc>
+                <a:spcPct val="120000"/>
+              </a:lnSpc>
+              <a:defRPr sz="4800" b="0" i="0">
+                <a:solidFill>
+                  <a:srgbClr val="9E6A5A"/>
+                </a:solidFill>
+                <a:latin typeface="Arimo"/>
+              </a:defRPr>
+            </a:pPr>
+            <a:r>
+              <a:rPr sz="4800" b="0" i="0">
+                <a:solidFill>
+                  <a:srgbClr val="9E6A5A"/>
+                </a:solidFill>
+                <a:latin typeface="Arimo"/>
+              </a:rPr>
+              <a:t>⚠️</a:t>
+            </a:r>
+          </a:p>
+        </p:txBody>
+      </p:sp>
+      <p:sp>
+        <p:nvSpPr>
+          <p:cNvPr id="12" name="TextBox 11"/>
+          <p:cNvSpPr txBox="1"/>
+          <p:nvPr/>
+        </p:nvSpPr>
+        <p:spPr>
+          <a:xfrm>
+            <a:off x="1517904" y="1607343"/>
+            <a:ext cx="6858000" cy="365760"/>
+          </a:xfrm>
+          <a:prstGeom prst="rect">
+            <a:avLst/>
+          </a:prstGeom>
+          <a:noFill/>
+        </p:spPr>
+        <p:txBody>
+          <a:bodyPr wrap="square" tIns="0" bIns="0" lIns="0" rIns="0">
+            <a:spAutoFit/>
+          </a:bodyPr>
+          <a:lstStyle/>
+          <a:p>
+            <a:pPr algn="l">
+              <a:lnSpc>
+                <a:spcPct val="120000"/>
+              </a:lnSpc>
               <a:defRPr sz="2000" b="1" i="0">
                 <a:solidFill>
                   <a:srgbClr val="9E6A5A"/>
@@ -7696,7 +9024,7 @@
       </p:sp>
       <p:sp>
         <p:nvSpPr>
-          <p:cNvPr id="9" name="TextBox 8"/>
+          <p:cNvPr id="13" name="TextBox 12"/>
           <p:cNvSpPr txBox="1"/>
           <p:nvPr/>
         </p:nvSpPr>
